--- a/plans/deck-collaborator.pptx
+++ b/plans/deck-collaborator.pptx
@@ -23,6 +23,9 @@
     <p:sldId id="271" r:id="rId22"/>
     <p:sldId id="272" r:id="rId23"/>
     <p:sldId id="273" r:id="rId24"/>
+    <p:sldId id="274" r:id="rId25"/>
+    <p:sldId id="275" r:id="rId26"/>
+    <p:sldId id="276" r:id="rId27"/>
   </p:sldIdLst>
   <p:sldSz cx="12191695" cy="6858000" type="screen4x3"/>
   <p:notesSz cx="6858000" cy="9144000"/>
@@ -3537,6 +3540,1152 @@
                   <a:srgbClr val="1A1A2E"/>
                 </a:solidFill>
               </a:rPr>
+              <a:t>Mechanics-to-mechanism map</a:t>
+            </a:r>
+          </a:p>
+        </p:txBody>
+      </p:sp>
+      <p:sp>
+        <p:nvSpPr>
+          <p:cNvPr id="3" name="TextBox 2"/>
+          <p:cNvSpPr txBox="1"/>
+          <p:nvPr/>
+        </p:nvSpPr>
+        <p:spPr>
+          <a:xfrm>
+            <a:off x="457200" y="1280160"/>
+            <a:ext cx="11247120" cy="5303520"/>
+          </a:xfrm>
+          <a:prstGeom prst="rect">
+            <a:avLst/>
+          </a:prstGeom>
+          <a:noFill/>
+        </p:spPr>
+        <p:txBody>
+          <a:bodyPr wrap="square">
+            <a:spAutoFit/>
+          </a:bodyPr>
+          <a:lstStyle/>
+          <a:p>
+            <a:pPr algn="l">
+              <a:spcAft>
+                <a:spcPts val="800"/>
+              </a:spcAft>
+            </a:pPr>
+            <a:r>
+              <a:rPr sz="1800"/>
+              <a:t>The retention claims aren't aspirational. Each product surface is wired to a peer-reviewed cognitive-psychology mechanism with a measurable outcome. The L-codes are referenced from ./content-pack-management-plan.md § D1 / § D7.</a:t>
+            </a:r>
+          </a:p>
+          <a:p>
+            <a:pPr algn="l">
+              <a:spcAft>
+                <a:spcPts val="800"/>
+              </a:spcAft>
+            </a:pPr>
+            <a:r>
+              <a:rPr sz="1800"/>
+              <a:t>SME side (SM1–SM8) is the same shape — see §D2 of the plan.</a:t>
+            </a:r>
+          </a:p>
+        </p:txBody>
+      </p:sp>
+      <p:graphicFrame>
+        <p:nvGraphicFramePr>
+          <p:cNvPr id="4" name="Table 3"/>
+          <p:cNvGraphicFramePr>
+            <a:graphicFrameLocks noGrp="1"/>
+          </p:cNvGraphicFramePr>
+          <p:nvPr/>
+        </p:nvGraphicFramePr>
+        <p:xfrm>
+          <a:off x="457200" y="2240280"/>
+          <a:ext cx="11247120" cy="3703320"/>
+        </p:xfrm>
+        <a:graphic>
+          <a:graphicData uri="http://schemas.openxmlformats.org/drawingml/2006/table">
+            <a:tbl>
+              <a:tblPr firstRow="1" bandRow="1">
+                <a:tableStyleId>{5C22544A-7EE6-4342-B048-85BDC9FD1C3A}</a:tableStyleId>
+              </a:tblPr>
+              <a:tblGrid>
+                <a:gridCol w="3749040"/>
+                <a:gridCol w="3749040"/>
+                <a:gridCol w="3749040"/>
+              </a:tblGrid>
+              <a:tr h="411480">
+                <a:tc>
+                  <a:txBody>
+                    <a:bodyPr/>
+                    <a:lstStyle/>
+                    <a:p>
+                      <a:r>
+                        <a:rPr sz="1100" b="1">
+                          <a:solidFill>
+                            <a:srgbClr val="FFFFFF"/>
+                          </a:solidFill>
+                        </a:rPr>
+                        <a:t>Feature</a:t>
+                      </a:r>
+                    </a:p>
+                  </a:txBody>
+                  <a:tcPr>
+                    <a:solidFill>
+                      <a:srgbClr val="1A1A2E"/>
+                    </a:solidFill>
+                  </a:tcPr>
+                </a:tc>
+                <a:tc>
+                  <a:txBody>
+                    <a:bodyPr/>
+                    <a:lstStyle/>
+                    <a:p>
+                      <a:r>
+                        <a:rPr sz="1100" b="1">
+                          <a:solidFill>
+                            <a:srgbClr val="FFFFFF"/>
+                          </a:solidFill>
+                        </a:rPr>
+                        <a:t>Research source</a:t>
+                      </a:r>
+                    </a:p>
+                  </a:txBody>
+                  <a:tcPr>
+                    <a:solidFill>
+                      <a:srgbClr val="1A1A2E"/>
+                    </a:solidFill>
+                  </a:tcPr>
+                </a:tc>
+                <a:tc>
+                  <a:txBody>
+                    <a:bodyPr/>
+                    <a:lstStyle/>
+                    <a:p>
+                      <a:r>
+                        <a:rPr sz="1100" b="1">
+                          <a:solidFill>
+                            <a:srgbClr val="FFFFFF"/>
+                          </a:solidFill>
+                        </a:rPr>
+                        <a:t>Measured outcome</a:t>
+                      </a:r>
+                    </a:p>
+                  </a:txBody>
+                  <a:tcPr>
+                    <a:solidFill>
+                      <a:srgbClr val="1A1A2E"/>
+                    </a:solidFill>
+                  </a:tcPr>
+                </a:tc>
+              </a:tr>
+              <a:tr h="411480">
+                <a:tc>
+                  <a:txBody>
+                    <a:bodyPr/>
+                    <a:lstStyle/>
+                    <a:p>
+                      <a:r>
+                        <a:rPr sz="1100"/>
+                        <a:t>LM1 Spaced-review banner (expanding interval 1/3/7/14/30d)</a:t>
+                      </a:r>
+                    </a:p>
+                  </a:txBody>
+                  <a:tcPr/>
+                </a:tc>
+                <a:tc>
+                  <a:txBody>
+                    <a:bodyPr/>
+                    <a:lstStyle/>
+                    <a:p>
+                      <a:r>
+                        <a:rPr sz="1100"/>
+                        <a:t>Cepeda et al. 2008 (Psych Sci); Murre &amp; Dros 2015</a:t>
+                      </a:r>
+                    </a:p>
+                  </a:txBody>
+                  <a:tcPr/>
+                </a:tc>
+                <a:tc>
+                  <a:txBody>
+                    <a:bodyPr/>
+                    <a:lstStyle/>
+                    <a:p>
+                      <a:r>
+                        <a:rPr sz="1100"/>
+                        <a:t>D7 cohort-retention lift</a:t>
+                      </a:r>
+                    </a:p>
+                  </a:txBody>
+                  <a:tcPr/>
+                </a:tc>
+              </a:tr>
+              <a:tr h="411480">
+                <a:tc>
+                  <a:txBody>
+                    <a:bodyPr/>
+                    <a:lstStyle/>
+                    <a:p>
+                      <a:r>
+                        <a:rPr sz="1100"/>
+                        <a:t>LM2 Mid-lesson retrieval gate</a:t>
+                      </a:r>
+                    </a:p>
+                  </a:txBody>
+                  <a:tcPr/>
+                </a:tc>
+                <a:tc>
+                  <a:txBody>
+                    <a:bodyPr/>
+                    <a:lstStyle/>
+                    <a:p>
+                      <a:r>
+                        <a:rPr sz="1100"/>
+                        <a:t>Roediger &amp; Karpicke 2006; Karpicke &amp; Blunt 2011 (Science)</a:t>
+                      </a:r>
+                    </a:p>
+                  </a:txBody>
+                  <a:tcPr/>
+                </a:tc>
+                <a:tc>
+                  <a:txBody>
+                    <a:bodyPr/>
+                    <a:lstStyle/>
+                    <a:p>
+                      <a:r>
+                        <a:rPr sz="1100"/>
+                        <a:t>Mock pass-rate lift; calibration-Δ closure</a:t>
+                      </a:r>
+                    </a:p>
+                  </a:txBody>
+                  <a:tcPr/>
+                </a:tc>
+              </a:tr>
+              <a:tr h="411480">
+                <a:tc>
+                  <a:txBody>
+                    <a:bodyPr/>
+                    <a:lstStyle/>
+                    <a:p>
+                      <a:r>
+                        <a:rPr sz="1100"/>
+                        <a:t>LM3 Generation-before-reveal</a:t>
+                      </a:r>
+                    </a:p>
+                  </a:txBody>
+                  <a:tcPr/>
+                </a:tc>
+                <a:tc>
+                  <a:txBody>
+                    <a:bodyPr/>
+                    <a:lstStyle/>
+                    <a:p>
+                      <a:r>
+                        <a:rPr sz="1100"/>
+                        <a:t>Slamecka &amp; Graf 1978</a:t>
+                      </a:r>
+                    </a:p>
+                  </a:txBody>
+                  <a:tcPr/>
+                </a:tc>
+                <a:tc>
+                  <a:txBody>
+                    <a:bodyPr/>
+                    <a:lstStyle/>
+                    <a:p>
+                      <a:r>
+                        <a:rPr sz="1100"/>
+                        <a:t>Long-term retention +30%</a:t>
+                      </a:r>
+                    </a:p>
+                  </a:txBody>
+                  <a:tcPr/>
+                </a:tc>
+              </a:tr>
+              <a:tr h="411480">
+                <a:tc>
+                  <a:txBody>
+                    <a:bodyPr/>
+                    <a:lstStyle/>
+                    <a:p>
+                      <a:r>
+                        <a:rPr sz="1100"/>
+                        <a:t>LM4 Interleaved recommender</a:t>
+                      </a:r>
+                    </a:p>
+                  </a:txBody>
+                  <a:tcPr/>
+                </a:tc>
+                <a:tc>
+                  <a:txBody>
+                    <a:bodyPr/>
+                    <a:lstStyle/>
+                    <a:p>
+                      <a:r>
+                        <a:rPr sz="1100"/>
+                        <a:t>Rohrer &amp; Taylor 2007</a:t>
+                      </a:r>
+                    </a:p>
+                  </a:txBody>
+                  <a:tcPr/>
+                </a:tc>
+                <a:tc>
+                  <a:txBody>
+                    <a:bodyPr/>
+                    <a:lstStyle/>
+                    <a:p>
+                      <a:r>
+                        <a:rPr sz="1100"/>
+                        <a:t>Transfer-question accuracy lift</a:t>
+                      </a:r>
+                    </a:p>
+                  </a:txBody>
+                  <a:tcPr/>
+                </a:tc>
+              </a:tr>
+              <a:tr h="411480">
+                <a:tc>
+                  <a:txBody>
+                    <a:bodyPr/>
+                    <a:lstStyle/>
+                    <a:p>
+                      <a:r>
+                        <a:rPr sz="1100"/>
+                        <a:t>LM5 Worked-example fading + expertise-reversal cutover</a:t>
+                      </a:r>
+                    </a:p>
+                  </a:txBody>
+                  <a:tcPr/>
+                </a:tc>
+                <a:tc>
+                  <a:txBody>
+                    <a:bodyPr/>
+                    <a:lstStyle/>
+                    <a:p>
+                      <a:r>
+                        <a:rPr sz="1100"/>
+                        <a:t>Sweller, van Merriënboer &amp; Paas 2019; Kalyuga 2003</a:t>
+                      </a:r>
+                    </a:p>
+                  </a:txBody>
+                  <a:tcPr/>
+                </a:tc>
+                <a:tc>
+                  <a:txBody>
+                    <a:bodyPr/>
+                    <a:lstStyle/>
+                    <a:p>
+                      <a:r>
+                        <a:rPr sz="1100"/>
+                        <a:t>Per-rung intervention efficacy</a:t>
+                      </a:r>
+                    </a:p>
+                  </a:txBody>
+                  <a:tcPr/>
+                </a:tc>
+              </a:tr>
+              <a:tr h="411480">
+                <a:tc>
+                  <a:txBody>
+                    <a:bodyPr/>
+                    <a:lstStyle/>
+                    <a:p>
+                      <a:r>
+                        <a:rPr sz="1100"/>
+                        <a:t>LM6 Calibration column</a:t>
+                      </a:r>
+                    </a:p>
+                  </a:txBody>
+                  <a:tcPr/>
+                </a:tc>
+                <a:tc>
+                  <a:txBody>
+                    <a:bodyPr/>
+                    <a:lstStyle/>
+                    <a:p>
+                      <a:r>
+                        <a:rPr sz="1100"/>
+                        <a:t>Dunlosky &amp; Bjork; Kruger &amp; Dunning 1999</a:t>
+                      </a:r>
+                    </a:p>
+                  </a:txBody>
+                  <a:tcPr/>
+                </a:tc>
+                <a:tc>
+                  <a:txBody>
+                    <a:bodyPr/>
+                    <a:lstStyle/>
+                    <a:p>
+                      <a:r>
+                        <a:rPr sz="1100"/>
+                        <a:t>Calibration-Δ trend toward 0.5</a:t>
+                      </a:r>
+                    </a:p>
+                  </a:txBody>
+                  <a:tcPr/>
+                </a:tc>
+              </a:tr>
+              <a:tr h="411480">
+                <a:tc>
+                  <a:txBody>
+                    <a:bodyPr/>
+                    <a:lstStyle/>
+                    <a:p>
+                      <a:r>
+                        <a:rPr sz="1100"/>
+                        <a:t>LM7 Streak push (variable-ratio)</a:t>
+                      </a:r>
+                    </a:p>
+                  </a:txBody>
+                  <a:tcPr/>
+                </a:tc>
+                <a:tc>
+                  <a:txBody>
+                    <a:bodyPr/>
+                    <a:lstStyle/>
+                    <a:p>
+                      <a:r>
+                        <a:rPr sz="1100"/>
+                        <a:t>Eyal 2014; Skinner; Mazal 2022 (Duolingo)</a:t>
+                      </a:r>
+                    </a:p>
+                  </a:txBody>
+                  <a:tcPr/>
+                </a:tc>
+                <a:tc>
+                  <a:txBody>
+                    <a:bodyPr/>
+                    <a:lstStyle/>
+                    <a:p>
+                      <a:r>
+                        <a:rPr sz="1100"/>
+                        <a:t>CURR +21%, DAU 4.5× precedent</a:t>
+                      </a:r>
+                    </a:p>
+                  </a:txBody>
+                  <a:tcPr/>
+                </a:tc>
+              </a:tr>
+              <a:tr h="411480">
+                <a:tc>
+                  <a:txBody>
+                    <a:bodyPr/>
+                    <a:lstStyle/>
+                    <a:p>
+                      <a:r>
+                        <a:rPr sz="1100"/>
+                        <a:t>LM8 Cohort surface</a:t>
+                      </a:r>
+                    </a:p>
+                  </a:txBody>
+                  <a:tcPr/>
+                </a:tc>
+                <a:tc>
+                  <a:txBody>
+                    <a:bodyPr/>
+                    <a:lstStyle/>
+                    <a:p>
+                      <a:r>
+                        <a:rPr sz="1100"/>
+                        <a:t>Maven W1→W2 96% vs MOOC 16%; Reich &amp; Ruipérez-Valiente 2019 (Science)</a:t>
+                      </a:r>
+                    </a:p>
+                  </a:txBody>
+                  <a:tcPr/>
+                </a:tc>
+                <a:tc>
+                  <a:txBody>
+                    <a:bodyPr/>
+                    <a:lstStyle/>
+                    <a:p>
+                      <a:r>
+                        <a:rPr sz="1100"/>
+                        <a:t>Course-completion rate ≥ 60% target</a:t>
+                      </a:r>
+                    </a:p>
+                  </a:txBody>
+                  <a:tcPr/>
+                </a:tc>
+              </a:tr>
+            </a:tbl>
+          </a:graphicData>
+        </a:graphic>
+      </p:graphicFrame>
+    </p:spTree>
+  </p:cSld>
+  <p:clrMapOvr>
+    <a:masterClrMapping/>
+  </p:clrMapOvr>
+</p:sld>
+</file>
+
+<file path=ppt/slides/slide13.xml><?xml version="1.0" encoding="utf-8"?>
+<p:sld xmlns:a="http://schemas.openxmlformats.org/drawingml/2006/main" xmlns:p="http://schemas.openxmlformats.org/presentationml/2006/main" xmlns:r="http://schemas.openxmlformats.org/officeDocument/2006/relationships">
+  <p:cSld>
+    <p:spTree>
+      <p:nvGrpSpPr>
+        <p:cNvPr id="1" name=""/>
+        <p:cNvGrpSpPr/>
+        <p:nvPr/>
+      </p:nvGrpSpPr>
+      <p:grpSpPr/>
+      <p:sp>
+        <p:nvSpPr>
+          <p:cNvPr id="2" name="TextBox 1"/>
+          <p:cNvSpPr txBox="1"/>
+          <p:nvPr/>
+        </p:nvSpPr>
+        <p:spPr>
+          <a:xfrm>
+            <a:off x="457200" y="274320"/>
+            <a:ext cx="11247120" cy="914400"/>
+          </a:xfrm>
+          <a:prstGeom prst="rect">
+            <a:avLst/>
+          </a:prstGeom>
+          <a:noFill/>
+        </p:spPr>
+        <p:txBody>
+          <a:bodyPr wrap="square">
+            <a:spAutoFit/>
+          </a:bodyPr>
+          <a:lstStyle/>
+          <a:p>
+            <a:pPr algn="l"/>
+            <a:r>
+              <a:rPr sz="2800" b="1">
+                <a:solidFill>
+                  <a:srgbClr val="1A1A2E"/>
+                </a:solidFill>
+              </a:rPr>
+              <a:t>Phase-2 elicitation tooling</a:t>
+            </a:r>
+          </a:p>
+        </p:txBody>
+      </p:sp>
+      <p:sp>
+        <p:nvSpPr>
+          <p:cNvPr id="3" name="TextBox 2"/>
+          <p:cNvSpPr txBox="1"/>
+          <p:nvPr/>
+        </p:nvSpPr>
+        <p:spPr>
+          <a:xfrm>
+            <a:off x="457200" y="1280160"/>
+            <a:ext cx="11247120" cy="5303520"/>
+          </a:xfrm>
+          <a:prstGeom prst="rect">
+            <a:avLst/>
+          </a:prstGeom>
+          <a:noFill/>
+        </p:spPr>
+        <p:txBody>
+          <a:bodyPr wrap="square">
+            <a:spAutoFit/>
+          </a:bodyPr>
+          <a:lstStyle/>
+          <a:p>
+            <a:pPr algn="l">
+              <a:spcAft>
+                <a:spcPts val="800"/>
+              </a:spcAft>
+            </a:pPr>
+            <a:r>
+              <a:rPr sz="1800"/>
+              <a:t>Drafter + critic + SME-facing UI implementing SM1–SM8:</a:t>
+            </a:r>
+          </a:p>
+          <a:p>
+            <a:pPr algn="l">
+              <a:spcAft>
+                <a:spcPts val="800"/>
+              </a:spcAft>
+            </a:pPr>
+            <a:r>
+              <a:rPr sz="1800"/>
+              <a:t>Drafter prompt schema — required JSON fields matching the 5-probe CTA tree from 08-cheat-sheets/decision-trees.md § 6:</a:t>
+            </a:r>
+          </a:p>
+          <a:p>
+            <a:pPr>
+              <a:spcAft>
+                <a:spcPts val="600"/>
+              </a:spcAft>
+            </a:pPr>
+            <a:r>
+              <a:rPr sz="1100">
+                <a:latin typeface="Consolas"/>
+              </a:rPr>
+              <a:t>type DrafterIntake = {
+  novice_error: string;          // (a) expert-blind-spot probe
+  one_principle: string;         // (b) backward-design — closed taxonomy
+  worked_example: string;        // (c) Sweller worked-example
+  faded_variant: string;         // (c) Sweller faded variant
+  boundary_case: string;         // (d) CTA boundary probe
+  nearest_confusable: string;    // (e) interleaving prep — Rohrer &amp; Taylor
+};</a:t>
+            </a:r>
+          </a:p>
+          <a:p>
+            <a:pPr algn="l">
+              <a:spcAft>
+                <a:spcPts val="800"/>
+              </a:spcAft>
+            </a:pPr>
+            <a:r>
+              <a:rPr sz="1800"/>
+              <a:t>Critic prompt schema (Opus on Sonnet drafts):</a:t>
+            </a:r>
+          </a:p>
+          <a:p>
+            <a:pPr>
+              <a:spcAft>
+                <a:spcPts val="600"/>
+              </a:spcAft>
+            </a:pPr>
+            <a:r>
+              <a:rPr sz="1100">
+                <a:latin typeface="Consolas"/>
+              </a:rPr>
+              <a:t>type CriticOutput = {
+  confidence: number;                          // 0..1
+  missing_components: ('learning_tasks' | 'supportive_info' |
+                       'jit_info' | 'part_task_practice')[];   // 4C/ID
+  blind_spot_flags: string[];                  // SM4-style probes
+  fcode_risks: ('F1' | 'F2' | ... | 'F12')[]; // pre-publish failure-mode scan
+  suggested_probes: string[];                  // SM8 dashboard input
+};</a:t>
+            </a:r>
+          </a:p>
+          <a:p>
+            <a:pPr algn="l">
+              <a:spcAft>
+                <a:spcPts val="800"/>
+              </a:spcAft>
+            </a:pPr>
+            <a:r>
+              <a:rPr sz="1800"/>
+              <a:t>SME-facing UI affordances:</a:t>
+            </a:r>
+          </a:p>
+          <a:p>
+            <a:pPr>
+              <a:spcAft>
+                <a:spcPts val="600"/>
+              </a:spcAft>
+            </a:pPr>
+            <a:r>
+              <a:rPr sz="1600"/>
+              <a:t>Principle-picker (closed taxonomy; rejection if free-typed and</a:t>
+            </a:r>
+          </a:p>
+          <a:p>
+            <a:pPr algn="l">
+              <a:spcAft>
+                <a:spcPts val="800"/>
+              </a:spcAft>
+            </a:pPr>
+            <a:r>
+              <a:rPr sz="1800"/>
+              <a:t>unmapped) — pre-empts F12 cue-bias and F4 rationale gap.</a:t>
+            </a:r>
+          </a:p>
+          <a:p>
+            <a:pPr/>
+            <a:r>
+              <a:rPr sz="1600"/>
+              <a:t>Worked-example pair editor (worked + faded variant required).</a:t>
+            </a:r>
+          </a:p>
+          <a:p>
+            <a:pPr/>
+            <a:r>
+              <a:rPr sz="1600"/>
+              <a:t>"What would a novice get wrong?" textarea (SM4).</a:t>
+            </a:r>
+          </a:p>
+          <a:p>
+            <a:pPr/>
+            <a:r>
+              <a:rPr sz="1600"/>
+              <a:t>Backward-design "write the test first" mode (SM2).</a:t>
+            </a:r>
+          </a:p>
+          <a:p>
+            <a:pPr>
+              <a:spcAft>
+                <a:spcPts val="600"/>
+              </a:spcAft>
+            </a:pPr>
+            <a:r>
+              <a:rPr sz="1600"/>
+              <a:t>Per-SME blind-spot dashboard (SM8) showing aggregated critic</a:t>
+            </a:r>
+          </a:p>
+          <a:p>
+            <a:pPr algn="l">
+              <a:spcAft>
+                <a:spcPts val="800"/>
+              </a:spcAft>
+            </a:pPr>
+            <a:r>
+              <a:rPr sz="1800"/>
+              <a:t>feedback over time + personalised authoring prompts.</a:t>
+            </a:r>
+          </a:p>
+          <a:p>
+            <a:pPr algn="l">
+              <a:spcAft>
+                <a:spcPts val="800"/>
+              </a:spcAft>
+            </a:pPr>
+            <a:r>
+              <a:rPr sz="1800"/>
+              <a:t>Each surface tagged to which F1–F12 codes it pre-empts in the source comments (audit trail for the codex review pipeline).</a:t>
+            </a:r>
+          </a:p>
+        </p:txBody>
+      </p:sp>
+    </p:spTree>
+  </p:cSld>
+  <p:clrMapOvr>
+    <a:masterClrMapping/>
+  </p:clrMapOvr>
+</p:sld>
+</file>
+
+<file path=ppt/slides/slide14.xml><?xml version="1.0" encoding="utf-8"?>
+<p:sld xmlns:a="http://schemas.openxmlformats.org/drawingml/2006/main" xmlns:p="http://schemas.openxmlformats.org/presentationml/2006/main" xmlns:r="http://schemas.openxmlformats.org/officeDocument/2006/relationships">
+  <p:cSld>
+    <p:spTree>
+      <p:nvGrpSpPr>
+        <p:cNvPr id="1" name=""/>
+        <p:cNvGrpSpPr/>
+        <p:nvPr/>
+      </p:nvGrpSpPr>
+      <p:grpSpPr/>
+      <p:sp>
+        <p:nvSpPr>
+          <p:cNvPr id="2" name="TextBox 1"/>
+          <p:cNvSpPr txBox="1"/>
+          <p:nvPr/>
+        </p:nvSpPr>
+        <p:spPr>
+          <a:xfrm>
+            <a:off x="457200" y="274320"/>
+            <a:ext cx="11247120" cy="914400"/>
+          </a:xfrm>
+          <a:prstGeom prst="rect">
+            <a:avLst/>
+          </a:prstGeom>
+          <a:noFill/>
+        </p:spPr>
+        <p:txBody>
+          <a:bodyPr wrap="square">
+            <a:spAutoFit/>
+          </a:bodyPr>
+          <a:lstStyle/>
+          <a:p>
+            <a:pPr algn="l"/>
+            <a:r>
+              <a:rPr sz="2800" b="1">
+                <a:solidFill>
+                  <a:srgbClr val="1A1A2E"/>
+                </a:solidFill>
+              </a:rPr>
+              <a:t>Segment-aware UI/affordance map</a:t>
+            </a:r>
+          </a:p>
+        </p:txBody>
+      </p:sp>
+      <p:sp>
+        <p:nvSpPr>
+          <p:cNvPr id="3" name="TextBox 2"/>
+          <p:cNvSpPr txBox="1"/>
+          <p:nvPr/>
+        </p:nvSpPr>
+        <p:spPr>
+          <a:xfrm>
+            <a:off x="457200" y="1280160"/>
+            <a:ext cx="11247120" cy="5303520"/>
+          </a:xfrm>
+          <a:prstGeom prst="rect">
+            <a:avLst/>
+          </a:prstGeom>
+          <a:noFill/>
+        </p:spPr>
+        <p:txBody>
+          <a:bodyPr wrap="square">
+            <a:spAutoFit/>
+          </a:bodyPr>
+          <a:lstStyle/>
+          <a:p>
+            <a:pPr algn="l">
+              <a:spcAft>
+                <a:spcPts val="800"/>
+              </a:spcAft>
+            </a:pPr>
+            <a:r>
+              <a:rPr sz="1800"/>
+              <a:t>One critic engine + one CTA-probe schema + one calibration-Δ column, projected through segment-specific UI affordances. The mechanism set does not vary by segment — only the surface does.</a:t>
+            </a:r>
+          </a:p>
+          <a:p>
+            <a:pPr algn="l">
+              <a:spcAft>
+                <a:spcPts val="800"/>
+              </a:spcAft>
+            </a:pPr>
+            <a:r>
+              <a:rPr sz="1800"/>
+              <a:t>That's the wiring diagram. One engine, segment-specific projections.</a:t>
+            </a:r>
+          </a:p>
+        </p:txBody>
+      </p:sp>
+      <p:graphicFrame>
+        <p:nvGraphicFramePr>
+          <p:cNvPr id="4" name="Table 3"/>
+          <p:cNvGraphicFramePr>
+            <a:graphicFrameLocks noGrp="1"/>
+          </p:cNvGraphicFramePr>
+          <p:nvPr/>
+        </p:nvGraphicFramePr>
+        <p:xfrm>
+          <a:off x="457200" y="2240280"/>
+          <a:ext cx="11247120" cy="2468880"/>
+        </p:xfrm>
+        <a:graphic>
+          <a:graphicData uri="http://schemas.openxmlformats.org/drawingml/2006/table">
+            <a:tbl>
+              <a:tblPr firstRow="1" bandRow="1">
+                <a:tableStyleId>{5C22544A-7EE6-4342-B048-85BDC9FD1C3A}</a:tableStyleId>
+              </a:tblPr>
+              <a:tblGrid>
+                <a:gridCol w="3749040"/>
+                <a:gridCol w="3749040"/>
+                <a:gridCol w="3749040"/>
+              </a:tblGrid>
+              <a:tr h="411480">
+                <a:tc>
+                  <a:txBody>
+                    <a:bodyPr/>
+                    <a:lstStyle/>
+                    <a:p>
+                      <a:r>
+                        <a:rPr sz="1100" b="1">
+                          <a:solidFill>
+                            <a:srgbClr val="FFFFFF"/>
+                          </a:solidFill>
+                        </a:rPr>
+                        <a:t>Segment</a:t>
+                      </a:r>
+                    </a:p>
+                  </a:txBody>
+                  <a:tcPr>
+                    <a:solidFill>
+                      <a:srgbClr val="1A1A2E"/>
+                    </a:solidFill>
+                  </a:tcPr>
+                </a:tc>
+                <a:tc>
+                  <a:txBody>
+                    <a:bodyPr/>
+                    <a:lstStyle/>
+                    <a:p>
+                      <a:r>
+                        <a:rPr sz="1100" b="1">
+                          <a:solidFill>
+                            <a:srgbClr val="FFFFFF"/>
+                          </a:solidFill>
+                        </a:rPr>
+                        <a:t>UI/affordance variation</a:t>
+                      </a:r>
+                    </a:p>
+                  </a:txBody>
+                  <a:tcPr>
+                    <a:solidFill>
+                      <a:srgbClr val="1A1A2E"/>
+                    </a:solidFill>
+                  </a:tcPr>
+                </a:tc>
+                <a:tc>
+                  <a:txBody>
+                    <a:bodyPr/>
+                    <a:lstStyle/>
+                    <a:p>
+                      <a:r>
+                        <a:rPr sz="1100" b="1">
+                          <a:solidFill>
+                            <a:srgbClr val="FFFFFF"/>
+                          </a:solidFill>
+                        </a:rPr>
+                        <a:t>Phase-2 component (engineering wiring)</a:t>
+                      </a:r>
+                    </a:p>
+                  </a:txBody>
+                  <a:tcPr>
+                    <a:solidFill>
+                      <a:srgbClr val="1A1A2E"/>
+                    </a:solidFill>
+                  </a:tcPr>
+                </a:tc>
+              </a:tr>
+              <a:tr h="411480">
+                <a:tc>
+                  <a:txBody>
+                    <a:bodyPr/>
+                    <a:lstStyle/>
+                    <a:p>
+                      <a:r>
+                        <a:rPr sz="1100"/>
+                        <a:t>Deskless mobile (manufacturing / retail / hospitality / healthcare-frontline)</a:t>
+                      </a:r>
+                    </a:p>
+                  </a:txBody>
+                  <a:tcPr/>
+                </a:tc>
+                <a:tc>
+                  <a:txBody>
+                    <a:bodyPr/>
+                    <a:lstStyle/>
+                    <a:p>
+                      <a:r>
+                        <a:rPr sz="1100"/>
+                        <a:t>Voice-to-text capture; ≤ 3-min nano-format; offline cache; push at variable-ratio</a:t>
+                      </a:r>
+                    </a:p>
+                  </a:txBody>
+                  <a:tcPr/>
+                </a:tc>
+                <a:tc>
+                  <a:txBody>
+                    <a:bodyPr/>
+                    <a:lstStyle/>
+                    <a:p>
+                      <a:r>
+                        <a:rPr sz="1100"/>
+                        <a:t>web/src/app/(learner)/deskless/ route group; voice-capture.ts; service worker for offline</a:t>
+                      </a:r>
+                    </a:p>
+                  </a:txBody>
+                  <a:tcPr/>
+                </a:tc>
+              </a:tr>
+              <a:tr h="411480">
+                <a:tc>
+                  <a:txBody>
+                    <a:bodyPr/>
+                    <a:lstStyle/>
+                    <a:p>
+                      <a:r>
+                        <a:rPr sz="1100"/>
+                        <a:t>Compliance enterprise (finance / healthcare / government)</a:t>
+                      </a:r>
+                    </a:p>
+                  </a:txBody>
+                  <a:tcPr/>
+                </a:tc>
+                <a:tc>
+                  <a:txBody>
+                    <a:bodyPr/>
+                    <a:lstStyle/>
+                    <a:p>
+                      <a:r>
+                        <a:rPr sz="1100"/>
+                        <a:t>SCORM 2004 + xAPI emit; audit-trail; version-pin; role-based publish; WCAG 2.2 AA / Section 508</a:t>
+                      </a:r>
+                    </a:p>
+                  </a:txBody>
+                  <a:tcPr/>
+                </a:tc>
+                <a:tc>
+                  <a:txBody>
+                    <a:bodyPr/>
+                    <a:lstStyle/>
+                    <a:p>
+                      <a:r>
+                        <a:rPr sz="1100"/>
+                        <a:t>Inngest xapi-emit workflow; Postgres audit_log + version_pin tables; Clerk SAML/SCIM; accessibility-conformance test gate</a:t>
+                      </a:r>
+                    </a:p>
+                  </a:txBody>
+                  <a:tcPr/>
+                </a:tc>
+              </a:tr>
+              <a:tr h="411480">
+                <a:tc>
+                  <a:txBody>
+                    <a:bodyPr/>
+                    <a:lstStyle/>
+                    <a:p>
+                      <a:r>
+                        <a:rPr sz="1100"/>
+                        <a:t>B2C cert-prep</a:t>
+                      </a:r>
+                    </a:p>
+                  </a:txBody>
+                  <a:tcPr/>
+                </a:tc>
+                <a:tc>
+                  <a:txBody>
+                    <a:bodyPr/>
+                    <a:lstStyle/>
+                    <a:p>
+                      <a:r>
+                        <a:rPr sz="1100"/>
+                        <a:t>Streak + cohort + leaderboard + goal-gradient progress bar (Hook Model + SDT)</a:t>
+                      </a:r>
+                    </a:p>
+                  </a:txBody>
+                  <a:tcPr/>
+                </a:tc>
+                <a:tc>
+                  <a:txBody>
+                    <a:bodyPr/>
+                    <a:lstStyle/>
+                    <a:p>
+                      <a:r>
+                        <a:rPr sz="1100"/>
+                        <a:t>web/src/components/streak/; web/src/app/(learner)/cohort/[id]/; web/src/components/dashboard/GoalGradient.tsx</a:t>
+                      </a:r>
+                    </a:p>
+                  </a:txBody>
+                  <a:tcPr/>
+                </a:tc>
+              </a:tr>
+              <a:tr h="411480">
+                <a:tc>
+                  <a:txBody>
+                    <a:bodyPr/>
+                    <a:lstStyle/>
+                    <a:p>
+                      <a:r>
+                        <a:rPr sz="1100"/>
+                        <a:t>Founder / SMB single-SME</a:t>
+                      </a:r>
+                    </a:p>
+                  </a:txBody>
+                  <a:tcPr/>
+                </a:tc>
+                <a:tc>
+                  <a:txBody>
+                    <a:bodyPr/>
+                    <a:lstStyle/>
+                    <a:p>
+                      <a:r>
+                        <a:rPr sz="1100"/>
+                        <a:t>Succession-of-knowledge wizard (interview-record → CTA-extract → auto-draft → reviewer-pair)</a:t>
+                      </a:r>
+                    </a:p>
+                  </a:txBody>
+                  <a:tcPr/>
+                </a:tc>
+                <a:tc>
+                  <a:txBody>
+                    <a:bodyPr/>
+                    <a:lstStyle/>
+                    <a:p>
+                      <a:r>
+                        <a:rPr sz="1100"/>
+                        <a:t>Inngest interview-extract workflow; R2 audio bucket; auto-draft model call</a:t>
+                      </a:r>
+                    </a:p>
+                  </a:txBody>
+                  <a:tcPr/>
+                </a:tc>
+              </a:tr>
+              <a:tr h="411480">
+                <a:tc>
+                  <a:txBody>
+                    <a:bodyPr/>
+                    <a:lstStyle/>
+                    <a:p>
+                      <a:r>
+                        <a:rPr sz="1100"/>
+                        <a:t>High-PDI / face-saving</a:t>
+                      </a:r>
+                    </a:p>
+                  </a:txBody>
+                  <a:tcPr/>
+                </a:tc>
+                <a:tc>
+                  <a:txBody>
+                    <a:bodyPr/>
+                    <a:lstStyle/>
+                    <a:p>
+                      <a:r>
+                        <a:rPr sz="1100"/>
+                        <a:t>Leader-endorsement step gate before SME publish; anonymised peer review; critic copy framed as probe / suggestion</a:t>
+                      </a:r>
+                    </a:p>
+                  </a:txBody>
+                  <a:tcPr/>
+                </a:tc>
+                <a:tc>
+                  <a:txBody>
+                    <a:bodyPr/>
+                    <a:lstStyle/>
+                    <a:p>
+                      <a:r>
+                        <a:rPr sz="1100"/>
+                        <a:t>tenant_policy.publish_gate = 'leader_endorse'; copy-variant table for critic-output i18n</a:t>
+                      </a:r>
+                    </a:p>
+                  </a:txBody>
+                  <a:tcPr/>
+                </a:tc>
+              </a:tr>
+            </a:tbl>
+          </a:graphicData>
+        </a:graphic>
+      </p:graphicFrame>
+    </p:spTree>
+  </p:cSld>
+  <p:clrMapOvr>
+    <a:masterClrMapping/>
+  </p:clrMapOvr>
+</p:sld>
+</file>
+
+<file path=ppt/slides/slide15.xml><?xml version="1.0" encoding="utf-8"?>
+<p:sld xmlns:a="http://schemas.openxmlformats.org/drawingml/2006/main" xmlns:p="http://schemas.openxmlformats.org/presentationml/2006/main" xmlns:r="http://schemas.openxmlformats.org/officeDocument/2006/relationships">
+  <p:cSld>
+    <p:spTree>
+      <p:nvGrpSpPr>
+        <p:cNvPr id="1" name=""/>
+        <p:cNvGrpSpPr/>
+        <p:nvPr/>
+      </p:nvGrpSpPr>
+      <p:grpSpPr/>
+      <p:sp>
+        <p:nvSpPr>
+          <p:cNvPr id="2" name="TextBox 1"/>
+          <p:cNvSpPr txBox="1"/>
+          <p:nvPr/>
+        </p:nvSpPr>
+        <p:spPr>
+          <a:xfrm>
+            <a:off x="457200" y="274320"/>
+            <a:ext cx="11247120" cy="914400"/>
+          </a:xfrm>
+          <a:prstGeom prst="rect">
+            <a:avLst/>
+          </a:prstGeom>
+          <a:noFill/>
+        </p:spPr>
+        <p:txBody>
+          <a:bodyPr wrap="square">
+            <a:spAutoFit/>
+          </a:bodyPr>
+          <a:lstStyle/>
+          <a:p>
+            <a:pPr algn="l"/>
+            <a:r>
+              <a:rPr sz="2800" b="1">
+                <a:solidFill>
+                  <a:srgbClr val="1A1A2E"/>
+                </a:solidFill>
+              </a:rPr>
               <a:t>Tooling &amp; developer experience</a:t>
             </a:r>
           </a:p>
@@ -4282,7 +5431,7 @@
 </p:sld>
 </file>
 
-<file path=ppt/slides/slide13.xml><?xml version="1.0" encoding="utf-8"?>
+<file path=ppt/slides/slide16.xml><?xml version="1.0" encoding="utf-8"?>
 <p:sld xmlns:a="http://schemas.openxmlformats.org/drawingml/2006/main" xmlns:p="http://schemas.openxmlformats.org/presentationml/2006/main" xmlns:r="http://schemas.openxmlformats.org/officeDocument/2006/relationships">
   <p:cSld>
     <p:spTree>
@@ -4420,341 +5569,6 @@
             <a:r>
               <a:rPr sz="1800"/>
               <a:t>These are documented in §C12 of the plan as "what we deliberately did not do."</a:t>
-            </a:r>
-          </a:p>
-        </p:txBody>
-      </p:sp>
-    </p:spTree>
-  </p:cSld>
-  <p:clrMapOvr>
-    <a:masterClrMapping/>
-  </p:clrMapOvr>
-</p:sld>
-</file>
-
-<file path=ppt/slides/slide14.xml><?xml version="1.0" encoding="utf-8"?>
-<p:sld xmlns:a="http://schemas.openxmlformats.org/drawingml/2006/main" xmlns:p="http://schemas.openxmlformats.org/presentationml/2006/main" xmlns:r="http://schemas.openxmlformats.org/officeDocument/2006/relationships">
-  <p:cSld>
-    <p:spTree>
-      <p:nvGrpSpPr>
-        <p:cNvPr id="1" name=""/>
-        <p:cNvGrpSpPr/>
-        <p:nvPr/>
-      </p:nvGrpSpPr>
-      <p:grpSpPr/>
-      <p:sp>
-        <p:nvSpPr>
-          <p:cNvPr id="2" name="TextBox 1"/>
-          <p:cNvSpPr txBox="1"/>
-          <p:nvPr/>
-        </p:nvSpPr>
-        <p:spPr>
-          <a:xfrm>
-            <a:off x="457200" y="274320"/>
-            <a:ext cx="11247120" cy="914400"/>
-          </a:xfrm>
-          <a:prstGeom prst="rect">
-            <a:avLst/>
-          </a:prstGeom>
-          <a:noFill/>
-        </p:spPr>
-        <p:txBody>
-          <a:bodyPr wrap="square">
-            <a:spAutoFit/>
-          </a:bodyPr>
-          <a:lstStyle/>
-          <a:p>
-            <a:pPr algn="l"/>
-            <a:r>
-              <a:rPr sz="2800" b="1">
-                <a:solidFill>
-                  <a:srgbClr val="1A1A2E"/>
-                </a:solidFill>
-              </a:rPr>
-              <a:t>Cadence &amp; decision rights</a:t>
-            </a:r>
-          </a:p>
-        </p:txBody>
-      </p:sp>
-      <p:sp>
-        <p:nvSpPr>
-          <p:cNvPr id="3" name="TextBox 2"/>
-          <p:cNvSpPr txBox="1"/>
-          <p:nvPr/>
-        </p:nvSpPr>
-        <p:spPr>
-          <a:xfrm>
-            <a:off x="457200" y="1280160"/>
-            <a:ext cx="11247120" cy="5303520"/>
-          </a:xfrm>
-          <a:prstGeom prst="rect">
-            <a:avLst/>
-          </a:prstGeom>
-          <a:noFill/>
-        </p:spPr>
-        <p:txBody>
-          <a:bodyPr wrap="square">
-            <a:spAutoFit/>
-          </a:bodyPr>
-          <a:lstStyle/>
-          <a:p>
-            <a:pPr/>
-            <a:r>
-              <a:rPr sz="1600"/>
-              <a:t>Founder/operator owns product priorities, customer convos, content authoring (in Phase 1 they're the SME).</a:t>
-            </a:r>
-          </a:p>
-          <a:p>
-            <a:pPr/>
-            <a:r>
-              <a:rPr sz="1600"/>
-              <a:t>Engineer/collaborator owns architecture, code review gate, test gate, performance budgets.</a:t>
-            </a:r>
-          </a:p>
-          <a:p>
-            <a:pPr/>
-            <a:r>
-              <a:rPr sz="1600"/>
-              <a:t>External review: every PR goes through a codex (gpt-5.5 with multi-vendor fallback) review workflow that posts a labeled comment. codex-blockers label = don't merge until addressed.</a:t>
-            </a:r>
-          </a:p>
-          <a:p>
-            <a:pPr/>
-            <a:r>
-              <a:rPr sz="1600"/>
-              <a:t>Async-first. Sync is for unblocking, not status.</a:t>
-            </a:r>
-          </a:p>
-          <a:p>
-            <a:pPr>
-              <a:spcAft>
-                <a:spcPts val="600"/>
-              </a:spcAft>
-            </a:pPr>
-            <a:r>
-              <a:rPr sz="1600"/>
-              <a:t>No standups. PR descriptions and the codex review serve as the audit trail.</a:t>
-            </a:r>
-          </a:p>
-        </p:txBody>
-      </p:sp>
-    </p:spTree>
-  </p:cSld>
-  <p:clrMapOvr>
-    <a:masterClrMapping/>
-  </p:clrMapOvr>
-</p:sld>
-</file>
-
-<file path=ppt/slides/slide15.xml><?xml version="1.0" encoding="utf-8"?>
-<p:sld xmlns:a="http://schemas.openxmlformats.org/drawingml/2006/main" xmlns:p="http://schemas.openxmlformats.org/presentationml/2006/main" xmlns:r="http://schemas.openxmlformats.org/officeDocument/2006/relationships">
-  <p:cSld>
-    <p:spTree>
-      <p:nvGrpSpPr>
-        <p:cNvPr id="1" name=""/>
-        <p:cNvGrpSpPr/>
-        <p:nvPr/>
-      </p:nvGrpSpPr>
-      <p:grpSpPr/>
-      <p:sp>
-        <p:nvSpPr>
-          <p:cNvPr id="2" name="TextBox 1"/>
-          <p:cNvSpPr txBox="1"/>
-          <p:nvPr/>
-        </p:nvSpPr>
-        <p:spPr>
-          <a:xfrm>
-            <a:off x="457200" y="274320"/>
-            <a:ext cx="11247120" cy="914400"/>
-          </a:xfrm>
-          <a:prstGeom prst="rect">
-            <a:avLst/>
-          </a:prstGeom>
-          <a:noFill/>
-        </p:spPr>
-        <p:txBody>
-          <a:bodyPr wrap="square">
-            <a:spAutoFit/>
-          </a:bodyPr>
-          <a:lstStyle/>
-          <a:p>
-            <a:pPr algn="l"/>
-            <a:r>
-              <a:rPr sz="2800" b="1">
-                <a:solidFill>
-                  <a:srgbClr val="1A1A2E"/>
-                </a:solidFill>
-              </a:rPr>
-              <a:t>What we're looking for</a:t>
-            </a:r>
-          </a:p>
-        </p:txBody>
-      </p:sp>
-      <p:sp>
-        <p:nvSpPr>
-          <p:cNvPr id="3" name="TextBox 2"/>
-          <p:cNvSpPr txBox="1"/>
-          <p:nvPr/>
-        </p:nvSpPr>
-        <p:spPr>
-          <a:xfrm>
-            <a:off x="457200" y="1280160"/>
-            <a:ext cx="11247120" cy="5303520"/>
-          </a:xfrm>
-          <a:prstGeom prst="rect">
-            <a:avLst/>
-          </a:prstGeom>
-          <a:noFill/>
-        </p:spPr>
-        <p:txBody>
-          <a:bodyPr wrap="square">
-            <a:spAutoFit/>
-          </a:bodyPr>
-          <a:lstStyle/>
-          <a:p>
-            <a:pPr/>
-            <a:r>
-              <a:rPr sz="1600"/>
-              <a:t>Senior full-stack — comfortable with TS, Postgres, Next.js App Router.</a:t>
-            </a:r>
-          </a:p>
-          <a:p>
-            <a:pPr/>
-            <a:r>
-              <a:rPr sz="1600"/>
-              <a:t>Opinionated about LLM evaluation and prompt engineering — not "let's prompt-tune" but "let's design the eval suite first".</a:t>
-            </a:r>
-          </a:p>
-          <a:p>
-            <a:pPr/>
-            <a:r>
-              <a:rPr sz="1600"/>
-              <a:t>Comfortable with shipping a paid product before adding hires (this isn't a fund-the-team situation).</a:t>
-            </a:r>
-          </a:p>
-          <a:p>
-            <a:pPr/>
-            <a:r>
-              <a:rPr sz="1600"/>
-              <a:t>Bias for shipping over architecting; suspicious of premature abstraction.</a:t>
-            </a:r>
-          </a:p>
-          <a:p>
-            <a:pPr>
-              <a:spcAft>
-                <a:spcPts val="600"/>
-              </a:spcAft>
-            </a:pPr>
-            <a:r>
-              <a:rPr sz="1600"/>
-              <a:t>Either a co-founder shape (equity-heavy, unpaid until revenue) or a first-hire shape (cash + small equity once Phase 1 hits the gate).</a:t>
-            </a:r>
-          </a:p>
-        </p:txBody>
-      </p:sp>
-    </p:spTree>
-  </p:cSld>
-  <p:clrMapOvr>
-    <a:masterClrMapping/>
-  </p:clrMapOvr>
-</p:sld>
-</file>
-
-<file path=ppt/slides/slide16.xml><?xml version="1.0" encoding="utf-8"?>
-<p:sld xmlns:a="http://schemas.openxmlformats.org/drawingml/2006/main" xmlns:p="http://schemas.openxmlformats.org/presentationml/2006/main" xmlns:r="http://schemas.openxmlformats.org/officeDocument/2006/relationships">
-  <p:cSld>
-    <p:spTree>
-      <p:nvGrpSpPr>
-        <p:cNvPr id="1" name=""/>
-        <p:cNvGrpSpPr/>
-        <p:nvPr/>
-      </p:nvGrpSpPr>
-      <p:grpSpPr/>
-      <p:sp>
-        <p:nvSpPr>
-          <p:cNvPr id="2" name="TextBox 1"/>
-          <p:cNvSpPr txBox="1"/>
-          <p:nvPr/>
-        </p:nvSpPr>
-        <p:spPr>
-          <a:xfrm>
-            <a:off x="457200" y="274320"/>
-            <a:ext cx="11247120" cy="914400"/>
-          </a:xfrm>
-          <a:prstGeom prst="rect">
-            <a:avLst/>
-          </a:prstGeom>
-          <a:noFill/>
-        </p:spPr>
-        <p:txBody>
-          <a:bodyPr wrap="square">
-            <a:spAutoFit/>
-          </a:bodyPr>
-          <a:lstStyle/>
-          <a:p>
-            <a:pPr algn="l"/>
-            <a:r>
-              <a:rPr sz="2800" b="1">
-                <a:solidFill>
-                  <a:srgbClr val="1A1A2E"/>
-                </a:solidFill>
-              </a:rPr>
-              <a:t>What we are NOT looking for</a:t>
-            </a:r>
-          </a:p>
-        </p:txBody>
-      </p:sp>
-      <p:sp>
-        <p:nvSpPr>
-          <p:cNvPr id="3" name="TextBox 2"/>
-          <p:cNvSpPr txBox="1"/>
-          <p:nvPr/>
-        </p:nvSpPr>
-        <p:spPr>
-          <a:xfrm>
-            <a:off x="457200" y="1280160"/>
-            <a:ext cx="11247120" cy="5303520"/>
-          </a:xfrm>
-          <a:prstGeom prst="rect">
-            <a:avLst/>
-          </a:prstGeom>
-          <a:noFill/>
-        </p:spPr>
-        <p:txBody>
-          <a:bodyPr wrap="square">
-            <a:spAutoFit/>
-          </a:bodyPr>
-          <a:lstStyle/>
-          <a:p>
-            <a:pPr/>
-            <a:r>
-              <a:rPr sz="1600"/>
-              <a:t>Someone who wants to refactor before shipping.</a:t>
-            </a:r>
-          </a:p>
-          <a:p>
-            <a:pPr/>
-            <a:r>
-              <a:rPr sz="1600"/>
-              <a:t>Someone who wants to use this as their first AI/LLM project (we need pattern-recognition, not learning-on-the-job here).</a:t>
-            </a:r>
-          </a:p>
-          <a:p>
-            <a:pPr/>
-            <a:r>
-              <a:rPr sz="1600"/>
-              <a:t>Someone who needs a salary in month 1 — Phase 1 has no revenue and no fundraising.</a:t>
-            </a:r>
-          </a:p>
-          <a:p>
-            <a:pPr>
-              <a:spcAft>
-                <a:spcPts val="600"/>
-              </a:spcAft>
-            </a:pPr>
-            <a:r>
-              <a:rPr sz="1600"/>
-              <a:t>Someone who wants to add another framework / language / orchestration layer to the stack.</a:t>
             </a:r>
           </a:p>
         </p:txBody>
@@ -4806,7 +5620,7 @@
                   <a:srgbClr val="1A1A2E"/>
                 </a:solidFill>
               </a:rPr>
-              <a:t>Next step</a:t>
+              <a:t>Cadence &amp; decision rights</a:t>
             </a:r>
           </a:p>
         </p:txBody>
@@ -4833,28 +5647,31 @@
           </a:bodyPr>
           <a:lstStyle/>
           <a:p>
-            <a:pPr algn="l">
-              <a:spcAft>
-                <a:spcPts val="800"/>
-              </a:spcAft>
-            </a:pPr>
-            <a:r>
-              <a:rPr sz="1800"/>
-              <a:t>If this looks interesting:</a:t>
-            </a:r>
-          </a:p>
-          <a:p>
             <a:pPr/>
             <a:r>
               <a:rPr sz="1600"/>
-              <a:t>Read the detailed plan (./content-pack-management-plan.md) — focus on §C2, §C5, §C7, §C12.</a:t>
+              <a:t>Founder/operator owns product priorities, customer convos, content authoring (in Phase 1 they're the SME).</a:t>
             </a:r>
           </a:p>
           <a:p>
             <a:pPr/>
             <a:r>
               <a:rPr sz="1600"/>
-              <a:t>30-minute call to talk about your projects + your read on this plan + what you'd change. No commitment from either side.</a:t>
+              <a:t>Engineer/collaborator owns architecture, code review gate, test gate, performance budgets.</a:t>
+            </a:r>
+          </a:p>
+          <a:p>
+            <a:pPr/>
+            <a:r>
+              <a:rPr sz="1600"/>
+              <a:t>External review: every PR goes through a codex (gpt-5.5 with multi-vendor fallback) review workflow that posts a labeled comment. codex-blockers label = don't merge until addressed.</a:t>
+            </a:r>
+          </a:p>
+          <a:p>
+            <a:pPr/>
+            <a:r>
+              <a:rPr sz="1600"/>
+              <a:t>Async-first. Sync is for unblocking, not status.</a:t>
             </a:r>
           </a:p>
           <a:p>
@@ -4865,18 +5682,7 @@
             </a:pPr>
             <a:r>
               <a:rPr sz="1600"/>
-              <a:t>If we click, we agree on a Phase 1 scope you'd own (probably one of P1, P3, or P4).</a:t>
-            </a:r>
-          </a:p>
-          <a:p>
-            <a:pPr algn="l">
-              <a:spcAft>
-                <a:spcPts val="800"/>
-              </a:spcAft>
-            </a:pPr>
-            <a:r>
-              <a:rPr sz="1800"/>
-              <a:t>Contact: [operator email] • [scheduling link]</a:t>
+              <a:t>No standups. PR descriptions and the codex review serve as the audit trail.</a:t>
             </a:r>
           </a:p>
         </p:txBody>
@@ -4928,7 +5734,7 @@
                   <a:srgbClr val="1A1A2E"/>
                 </a:solidFill>
               </a:rPr>
-              <a:t>In one sentence</a:t>
+              <a:t>What we're looking for</a:t>
             </a:r>
           </a:p>
         </p:txBody>
@@ -4955,18 +5761,149 @@
           </a:bodyPr>
           <a:lstStyle/>
           <a:p>
+            <a:pPr/>
+            <a:r>
+              <a:rPr sz="1600"/>
+              <a:t>Senior full-stack — comfortable with TS, Postgres, Next.js App Router.</a:t>
+            </a:r>
+          </a:p>
+          <a:p>
+            <a:pPr/>
+            <a:r>
+              <a:rPr sz="1600"/>
+              <a:t>Opinionated about LLM evaluation and prompt engineering — not "let's prompt-tune" but "let's design the eval suite first".</a:t>
+            </a:r>
+          </a:p>
+          <a:p>
+            <a:pPr/>
+            <a:r>
+              <a:rPr sz="1600"/>
+              <a:t>Comfortable with shipping a paid product before adding hires (this isn't a fund-the-team situation).</a:t>
+            </a:r>
+          </a:p>
+          <a:p>
+            <a:pPr/>
+            <a:r>
+              <a:rPr sz="1600"/>
+              <a:t>Bias for shipping over architecting; suspicious of premature abstraction.</a:t>
+            </a:r>
+          </a:p>
+          <a:p>
             <a:pPr>
               <a:spcAft>
                 <a:spcPts val="600"/>
               </a:spcAft>
             </a:pPr>
             <a:r>
-              <a:rPr sz="1800" i="1">
+              <a:rPr sz="1600"/>
+              <a:t>Either a co-founder shape (equity-heavy, unpaid until revenue) or a first-hire shape (cash + small equity once Phase 1 hits the gate).</a:t>
+            </a:r>
+          </a:p>
+        </p:txBody>
+      </p:sp>
+    </p:spTree>
+  </p:cSld>
+  <p:clrMapOvr>
+    <a:masterClrMapping/>
+  </p:clrMapOvr>
+</p:sld>
+</file>
+
+<file path=ppt/slides/slide19.xml><?xml version="1.0" encoding="utf-8"?>
+<p:sld xmlns:a="http://schemas.openxmlformats.org/drawingml/2006/main" xmlns:p="http://schemas.openxmlformats.org/presentationml/2006/main" xmlns:r="http://schemas.openxmlformats.org/officeDocument/2006/relationships">
+  <p:cSld>
+    <p:spTree>
+      <p:nvGrpSpPr>
+        <p:cNvPr id="1" name=""/>
+        <p:cNvGrpSpPr/>
+        <p:nvPr/>
+      </p:nvGrpSpPr>
+      <p:grpSpPr/>
+      <p:sp>
+        <p:nvSpPr>
+          <p:cNvPr id="2" name="TextBox 1"/>
+          <p:cNvSpPr txBox="1"/>
+          <p:nvPr/>
+        </p:nvSpPr>
+        <p:spPr>
+          <a:xfrm>
+            <a:off x="457200" y="274320"/>
+            <a:ext cx="11247120" cy="914400"/>
+          </a:xfrm>
+          <a:prstGeom prst="rect">
+            <a:avLst/>
+          </a:prstGeom>
+          <a:noFill/>
+        </p:spPr>
+        <p:txBody>
+          <a:bodyPr wrap="square">
+            <a:spAutoFit/>
+          </a:bodyPr>
+          <a:lstStyle/>
+          <a:p>
+            <a:pPr algn="l"/>
+            <a:r>
+              <a:rPr sz="2800" b="1">
                 <a:solidFill>
-                  <a:srgbClr val="4A4A6E"/>
+                  <a:srgbClr val="1A1A2E"/>
                 </a:solidFill>
               </a:rPr>
-              <a:t>We've got a quality-loop architecture that solves the AI-content trust problem, a real validator library already in production use, and a discipline of not building the expensive part until paying intent is signed — and we're looking for one strong technical partner who'll help ship Phase 1.</a:t>
+              <a:t>What we are NOT looking for</a:t>
+            </a:r>
+          </a:p>
+        </p:txBody>
+      </p:sp>
+      <p:sp>
+        <p:nvSpPr>
+          <p:cNvPr id="3" name="TextBox 2"/>
+          <p:cNvSpPr txBox="1"/>
+          <p:nvPr/>
+        </p:nvSpPr>
+        <p:spPr>
+          <a:xfrm>
+            <a:off x="457200" y="1280160"/>
+            <a:ext cx="11247120" cy="5303520"/>
+          </a:xfrm>
+          <a:prstGeom prst="rect">
+            <a:avLst/>
+          </a:prstGeom>
+          <a:noFill/>
+        </p:spPr>
+        <p:txBody>
+          <a:bodyPr wrap="square">
+            <a:spAutoFit/>
+          </a:bodyPr>
+          <a:lstStyle/>
+          <a:p>
+            <a:pPr/>
+            <a:r>
+              <a:rPr sz="1600"/>
+              <a:t>Someone who wants to refactor before shipping.</a:t>
+            </a:r>
+          </a:p>
+          <a:p>
+            <a:pPr/>
+            <a:r>
+              <a:rPr sz="1600"/>
+              <a:t>Someone who wants to use this as their first AI/LLM project (we need pattern-recognition, not learning-on-the-job here).</a:t>
+            </a:r>
+          </a:p>
+          <a:p>
+            <a:pPr/>
+            <a:r>
+              <a:rPr sz="1600"/>
+              <a:t>Someone who needs a salary in month 1 — Phase 1 has no revenue and no fundraising.</a:t>
+            </a:r>
+          </a:p>
+          <a:p>
+            <a:pPr>
+              <a:spcAft>
+                <a:spcPts val="600"/>
+              </a:spcAft>
+            </a:pPr>
+            <a:r>
+              <a:rPr sz="1600"/>
+              <a:t>Someone who wants to add another framework / language / orchestration layer to the stack.</a:t>
             </a:r>
           </a:p>
         </p:txBody>
@@ -5064,6 +6001,218 @@
             <a:r>
               <a:rPr sz="1800"/>
               <a:t>For: a senior engineer or technical co-founder. ~10-minute read. Assumes the detailed plan is the source of truth for everything below.</a:t>
+            </a:r>
+          </a:p>
+        </p:txBody>
+      </p:sp>
+    </p:spTree>
+  </p:cSld>
+  <p:clrMapOvr>
+    <a:masterClrMapping/>
+  </p:clrMapOvr>
+</p:sld>
+</file>
+
+<file path=ppt/slides/slide20.xml><?xml version="1.0" encoding="utf-8"?>
+<p:sld xmlns:a="http://schemas.openxmlformats.org/drawingml/2006/main" xmlns:p="http://schemas.openxmlformats.org/presentationml/2006/main" xmlns:r="http://schemas.openxmlformats.org/officeDocument/2006/relationships">
+  <p:cSld>
+    <p:spTree>
+      <p:nvGrpSpPr>
+        <p:cNvPr id="1" name=""/>
+        <p:cNvGrpSpPr/>
+        <p:nvPr/>
+      </p:nvGrpSpPr>
+      <p:grpSpPr/>
+      <p:sp>
+        <p:nvSpPr>
+          <p:cNvPr id="2" name="TextBox 1"/>
+          <p:cNvSpPr txBox="1"/>
+          <p:nvPr/>
+        </p:nvSpPr>
+        <p:spPr>
+          <a:xfrm>
+            <a:off x="457200" y="274320"/>
+            <a:ext cx="11247120" cy="914400"/>
+          </a:xfrm>
+          <a:prstGeom prst="rect">
+            <a:avLst/>
+          </a:prstGeom>
+          <a:noFill/>
+        </p:spPr>
+        <p:txBody>
+          <a:bodyPr wrap="square">
+            <a:spAutoFit/>
+          </a:bodyPr>
+          <a:lstStyle/>
+          <a:p>
+            <a:pPr algn="l"/>
+            <a:r>
+              <a:rPr sz="2800" b="1">
+                <a:solidFill>
+                  <a:srgbClr val="1A1A2E"/>
+                </a:solidFill>
+              </a:rPr>
+              <a:t>Next step</a:t>
+            </a:r>
+          </a:p>
+        </p:txBody>
+      </p:sp>
+      <p:sp>
+        <p:nvSpPr>
+          <p:cNvPr id="3" name="TextBox 2"/>
+          <p:cNvSpPr txBox="1"/>
+          <p:nvPr/>
+        </p:nvSpPr>
+        <p:spPr>
+          <a:xfrm>
+            <a:off x="457200" y="1280160"/>
+            <a:ext cx="11247120" cy="5303520"/>
+          </a:xfrm>
+          <a:prstGeom prst="rect">
+            <a:avLst/>
+          </a:prstGeom>
+          <a:noFill/>
+        </p:spPr>
+        <p:txBody>
+          <a:bodyPr wrap="square">
+            <a:spAutoFit/>
+          </a:bodyPr>
+          <a:lstStyle/>
+          <a:p>
+            <a:pPr algn="l">
+              <a:spcAft>
+                <a:spcPts val="800"/>
+              </a:spcAft>
+            </a:pPr>
+            <a:r>
+              <a:rPr sz="1800"/>
+              <a:t>If this looks interesting:</a:t>
+            </a:r>
+          </a:p>
+          <a:p>
+            <a:pPr/>
+            <a:r>
+              <a:rPr sz="1600"/>
+              <a:t>Read the detailed plan (./content-pack-management-plan.md) — focus on §C2, §C5, §C7, §C12.</a:t>
+            </a:r>
+          </a:p>
+          <a:p>
+            <a:pPr/>
+            <a:r>
+              <a:rPr sz="1600"/>
+              <a:t>30-minute call to talk about your projects + your read on this plan + what you'd change. No commitment from either side.</a:t>
+            </a:r>
+          </a:p>
+          <a:p>
+            <a:pPr>
+              <a:spcAft>
+                <a:spcPts val="600"/>
+              </a:spcAft>
+            </a:pPr>
+            <a:r>
+              <a:rPr sz="1600"/>
+              <a:t>If we click, we agree on a Phase 1 scope you'd own (probably one of P1, P3, or P4).</a:t>
+            </a:r>
+          </a:p>
+          <a:p>
+            <a:pPr algn="l">
+              <a:spcAft>
+                <a:spcPts val="800"/>
+              </a:spcAft>
+            </a:pPr>
+            <a:r>
+              <a:rPr sz="1800"/>
+              <a:t>Contact: [operator email] • [scheduling link]</a:t>
+            </a:r>
+          </a:p>
+        </p:txBody>
+      </p:sp>
+    </p:spTree>
+  </p:cSld>
+  <p:clrMapOvr>
+    <a:masterClrMapping/>
+  </p:clrMapOvr>
+</p:sld>
+</file>
+
+<file path=ppt/slides/slide21.xml><?xml version="1.0" encoding="utf-8"?>
+<p:sld xmlns:a="http://schemas.openxmlformats.org/drawingml/2006/main" xmlns:p="http://schemas.openxmlformats.org/presentationml/2006/main" xmlns:r="http://schemas.openxmlformats.org/officeDocument/2006/relationships">
+  <p:cSld>
+    <p:spTree>
+      <p:nvGrpSpPr>
+        <p:cNvPr id="1" name=""/>
+        <p:cNvGrpSpPr/>
+        <p:nvPr/>
+      </p:nvGrpSpPr>
+      <p:grpSpPr/>
+      <p:sp>
+        <p:nvSpPr>
+          <p:cNvPr id="2" name="TextBox 1"/>
+          <p:cNvSpPr txBox="1"/>
+          <p:nvPr/>
+        </p:nvSpPr>
+        <p:spPr>
+          <a:xfrm>
+            <a:off x="457200" y="274320"/>
+            <a:ext cx="11247120" cy="914400"/>
+          </a:xfrm>
+          <a:prstGeom prst="rect">
+            <a:avLst/>
+          </a:prstGeom>
+          <a:noFill/>
+        </p:spPr>
+        <p:txBody>
+          <a:bodyPr wrap="square">
+            <a:spAutoFit/>
+          </a:bodyPr>
+          <a:lstStyle/>
+          <a:p>
+            <a:pPr algn="l"/>
+            <a:r>
+              <a:rPr sz="2800" b="1">
+                <a:solidFill>
+                  <a:srgbClr val="1A1A2E"/>
+                </a:solidFill>
+              </a:rPr>
+              <a:t>In one sentence</a:t>
+            </a:r>
+          </a:p>
+        </p:txBody>
+      </p:sp>
+      <p:sp>
+        <p:nvSpPr>
+          <p:cNvPr id="3" name="TextBox 2"/>
+          <p:cNvSpPr txBox="1"/>
+          <p:nvPr/>
+        </p:nvSpPr>
+        <p:spPr>
+          <a:xfrm>
+            <a:off x="457200" y="1280160"/>
+            <a:ext cx="11247120" cy="5303520"/>
+          </a:xfrm>
+          <a:prstGeom prst="rect">
+            <a:avLst/>
+          </a:prstGeom>
+          <a:noFill/>
+        </p:spPr>
+        <p:txBody>
+          <a:bodyPr wrap="square">
+            <a:spAutoFit/>
+          </a:bodyPr>
+          <a:lstStyle/>
+          <a:p>
+            <a:pPr>
+              <a:spcAft>
+                <a:spcPts val="600"/>
+              </a:spcAft>
+            </a:pPr>
+            <a:r>
+              <a:rPr sz="1800" i="1">
+                <a:solidFill>
+                  <a:srgbClr val="4A4A6E"/>
+                </a:solidFill>
+              </a:rPr>
+              <a:t>We've got a quality-loop architecture that solves the AI-content trust problem, a real validator library already in production use, and a discipline of not building the expensive part until paying intent is signed — and we're looking for one strong technical partner who'll help ship Phase 1.</a:t>
             </a:r>
           </a:p>
         </p:txBody>
@@ -5863,14 +7012,21 @@
             <a:pPr/>
             <a:r>
               <a:rPr sz="1600"/>
-              <a:t>06-failure-analysis/error-log.md — the F1–F8 taxonomy and 23 documented failure modes.</a:t>
+              <a:t>06-failure-analysis/error-log.md — the F1–F12 cognitive failure-mode taxonomy and 23 documented failure modes (extended from F1–F8 in the methodology layer to cover JOL miscalibration, transfer failure, fluency illusion, and cue-bias / surface-feature bias). Each F-code has a mechanism crosswalk citing research source and standard remediation.</a:t>
             </a:r>
           </a:p>
           <a:p>
             <a:pPr/>
             <a:r>
               <a:rPr sz="1600"/>
-              <a:t>08-cheat-sheets/ — decision trees and anti-patterns the validators encode.</a:t>
+              <a:t>08-cheat-sheets/ — decision trees and anti-patterns the validators encode (now includes learner re-engagement tree, SME content-elicitation tree, and segment-aware mechanism selection tree).</a:t>
+            </a:r>
+          </a:p>
+          <a:p>
+            <a:pPr/>
+            <a:r>
+              <a:rPr sz="1600"/>
+              <a:t>09-progress-tracker/spaced-review.md and skills-matrix.md — the calibration-Δ and JOL doctrine the LM6 surface implements.</a:t>
             </a:r>
           </a:p>
           <a:p>
@@ -6469,6 +7625,41 @@
             </a:r>
           </a:p>
           <a:p>
+            <a:pPr/>
+            <a:r>
+              <a:rPr sz="1600"/>
+              <a:t>Cost dashboards — per-tenant token spend, alerts at 80% / 100%.</a:t>
+            </a:r>
+          </a:p>
+          <a:p>
+            <a:pPr/>
+            <a:r>
+              <a:rPr sz="1600"/>
+              <a:t>Calibration-Δ surface — JOL pre-answer captured in quiz runner; Δ written to progress server table; trend visible in dashboard stats panel. Implements LM6 (Dunlosky &amp; Bjork; Kruger &amp; Dunning 1999).</a:t>
+            </a:r>
+          </a:p>
+          <a:p>
+            <a:pPr/>
+            <a:r>
+              <a:rPr sz="1600"/>
+              <a:t>SME blind-spot dashboard — per-SME critic-feedback aggregated; personalised authoring prompts surfaced before next draft. Implements SM8 (Ericsson 1993 — deliberate-practice feedback channel).</a:t>
+            </a:r>
+          </a:p>
+          <a:p>
+            <a:pPr/>
+            <a:r>
+              <a:rPr sz="1600"/>
+              <a:t>Segment-affordance switchboard — per-tenant tenant_policy config selects which UI surface variation is active (deskless mobile / compliance-enterprise / B2C cohort / founder-SMB / high-PDI). One critic engine, many surfaces (cross-ref content-pack-management-plan §D6).</a:t>
+            </a:r>
+          </a:p>
+          <a:p>
+            <a:pPr/>
+            <a:r>
+              <a:rPr sz="1600"/>
+              <a:t>xAPI emit hooks — events posted to mid-market / enterprise tenants' SCORM/xAPI LMS for L2 / L3 Kirkpatrick reporting in their existing L&amp;D dashboards.</a:t>
+            </a:r>
+          </a:p>
+          <a:p>
             <a:pPr>
               <a:spcAft>
                 <a:spcPts val="600"/>
@@ -6476,7 +7667,7 @@
             </a:pPr>
             <a:r>
               <a:rPr sz="1600"/>
-              <a:t>Cost dashboards — per-tenant token spend, alerts at 80% / 100%.</a:t>
+              <a:t>WCAG 2.2 AA + Section 508 conformance — public-sector / enterprise prerequisite; accessibility audit passed before Enterprise tier is sold.</a:t>
             </a:r>
           </a:p>
         </p:txBody>

--- a/plans/deck-collaborator.pptx
+++ b/plans/deck-collaborator.pptx
@@ -3574,7 +3574,7 @@
             </a:pPr>
             <a:r>
               <a:rPr sz="1800"/>
-              <a:t>The retention claims aren't aspirational. Each product surface is wired to a peer-reviewed cognitive-psychology mechanism with a measurable outcome. The L-codes are referenced from ./content-pack-management-plan.md § D1 / § D7.</a:t>
+              <a:t>The retention claims aren't aspirational. Each product surface is wired to a peer-reviewed cognitive-psychology mechanism with a measurable outcome. The L-codes are referenced from ./content-pack-management-plan.md § D0 / § D1 / § D7. Read each row left-to-right: identified problem → shipped feature → research source → falsifiable metric.</a:t>
             </a:r>
           </a:p>
           <a:p>
@@ -3585,7 +3585,29 @@
             </a:pPr>
             <a:r>
               <a:rPr sz="1800"/>
-              <a:t>SME side (SM1–SM8) is the same shape — see §D2 of the plan.</a:t>
+              <a:t>Learner side (LM1–LM8):</a:t>
+            </a:r>
+          </a:p>
+          <a:p>
+            <a:pPr algn="l">
+              <a:spcAft>
+                <a:spcPts val="800"/>
+              </a:spcAft>
+            </a:pPr>
+            <a:r>
+              <a:rPr sz="1800"/>
+              <a:t>SME side (SM1–SM8):</a:t>
+            </a:r>
+          </a:p>
+          <a:p>
+            <a:pPr algn="l">
+              <a:spcAft>
+                <a:spcPts val="800"/>
+              </a:spcAft>
+            </a:pPr>
+            <a:r>
+              <a:rPr sz="1800"/>
+              <a:t>Coverage assertion. Every problem maps to ≥ 1 specific feature (file path or component named); every feature maps to ≥ 1 cited source. No problem is closed by exhortation alone. Cross-ref §D0 in the build plan for the canonical matrix.</a:t>
             </a:r>
           </a:p>
         </p:txBody>
@@ -3599,7 +3621,7 @@
           <p:nvPr/>
         </p:nvGraphicFramePr>
         <p:xfrm>
-          <a:off x="457200" y="2240280"/>
+          <a:off x="457200" y="2651760"/>
           <a:ext cx="11247120" cy="3703320"/>
         </p:xfrm>
         <a:graphic>
@@ -3609,9 +3631,12 @@
                 <a:tableStyleId>{5C22544A-7EE6-4342-B048-85BDC9FD1C3A}</a:tableStyleId>
               </a:tblPr>
               <a:tblGrid>
-                <a:gridCol w="3749040"/>
-                <a:gridCol w="3749040"/>
-                <a:gridCol w="3749040"/>
+                <a:gridCol w="1874520"/>
+                <a:gridCol w="1874520"/>
+                <a:gridCol w="1874520"/>
+                <a:gridCol w="1874520"/>
+                <a:gridCol w="1874520"/>
+                <a:gridCol w="1874520"/>
               </a:tblGrid>
               <a:tr h="411480">
                 <a:tc>
@@ -3625,7 +3650,7 @@
                             <a:srgbClr val="FFFFFF"/>
                           </a:solidFill>
                         </a:rPr>
-                        <a:t>Feature</a:t>
+                        <a:t>Problem solved</a:t>
                       </a:r>
                     </a:p>
                   </a:txBody>
@@ -3646,7 +3671,28 @@
                             <a:srgbClr val="FFFFFF"/>
                           </a:solidFill>
                         </a:rPr>
-                        <a:t>Research source</a:t>
+                        <a:t>Feature (specific surface)</a:t>
+                      </a:r>
+                    </a:p>
+                  </a:txBody>
+                  <a:tcPr>
+                    <a:solidFill>
+                      <a:srgbClr val="1A1A2E"/>
+                    </a:solidFill>
+                  </a:tcPr>
+                </a:tc>
+                <a:tc>
+                  <a:txBody>
+                    <a:bodyPr/>
+                    <a:lstStyle/>
+                    <a:p>
+                      <a:r>
+                        <a:rPr sz="1100" b="1">
+                          <a:solidFill>
+                            <a:srgbClr val="FFFFFF"/>
+                          </a:solidFill>
+                        </a:rPr>
+                        <a:t>Source</a:t>
                       </a:r>
                     </a:p>
                   </a:txBody>
@@ -3677,6 +3723,30 @@
                     </a:solidFill>
                   </a:tcPr>
                 </a:tc>
+                <a:tc>
+                  <a:txBody>
+                    <a:bodyPr/>
+                    <a:lstStyle/>
+                    <a:p/>
+                  </a:txBody>
+                  <a:tcPr>
+                    <a:solidFill>
+                      <a:srgbClr val="1A1A2E"/>
+                    </a:solidFill>
+                  </a:tcPr>
+                </a:tc>
+                <a:tc>
+                  <a:txBody>
+                    <a:bodyPr/>
+                    <a:lstStyle/>
+                    <a:p/>
+                  </a:txBody>
+                  <a:tcPr>
+                    <a:solidFill>
+                      <a:srgbClr val="1A1A2E"/>
+                    </a:solidFill>
+                  </a:tcPr>
+                </a:tc>
               </a:tr>
               <a:tr h="411480">
                 <a:tc>
@@ -3686,7 +3756,20 @@
                     <a:p>
                       <a:r>
                         <a:rPr sz="1100"/>
-                        <a:t>LM1 Spaced-review banner (expanding interval 1/3/7/14/30d)</a:t>
+                        <a:t>~25% retained at day 6 without review</a:t>
+                      </a:r>
+                    </a:p>
+                  </a:txBody>
+                  <a:tcPr/>
+                </a:tc>
+                <a:tc>
+                  <a:txBody>
+                    <a:bodyPr/>
+                    <a:lstStyle/>
+                    <a:p>
+                      <a:r>
+                        <a:rPr sz="1100"/>
+                        <a:t>LM1 Spaced-review banner (SpacedReviewBanner.tsx); 1/3/7/14/30d scheduler in web/src/lib/spaced-review.ts; cron-driven enqueue; leech rule</a:t>
                       </a:r>
                     </a:p>
                   </a:txBody>
@@ -3712,9 +3795,25 @@
                     <a:p>
                       <a:r>
                         <a:rPr sz="1100"/>
-                        <a:t>D7 cohort-retention lift</a:t>
-                      </a:r>
-                    </a:p>
+                        <a:t>D7 cohort-retention curve ≥ 40% (cohort tier)</a:t>
+                      </a:r>
+                    </a:p>
+                  </a:txBody>
+                  <a:tcPr/>
+                </a:tc>
+                <a:tc>
+                  <a:txBody>
+                    <a:bodyPr/>
+                    <a:lstStyle/>
+                    <a:p/>
+                  </a:txBody>
+                  <a:tcPr/>
+                </a:tc>
+                <a:tc>
+                  <a:txBody>
+                    <a:bodyPr/>
+                    <a:lstStyle/>
+                    <a:p/>
                   </a:txBody>
                   <a:tcPr/>
                 </a:tc>
@@ -3727,7 +3826,20 @@
                     <a:p>
                       <a:r>
                         <a:rPr sz="1100"/>
-                        <a:t>LM2 Mid-lesson retrieval gate</a:t>
+                        <a:t>Re-reading produces fluency illusion, not learning</a:t>
+                      </a:r>
+                    </a:p>
+                  </a:txBody>
+                  <a:tcPr/>
+                </a:tc>
+                <a:tc>
+                  <a:txBody>
+                    <a:bodyPr/>
+                    <a:lstStyle/>
+                    <a:p>
+                      <a:r>
+                        <a:rPr sz="1100"/>
+                        <a:t>LM2 Mid-lesson retrieval gate (RetrievalGate primitive in LessonView.tsx); recall-write before reveal</a:t>
                       </a:r>
                     </a:p>
                   </a:txBody>
@@ -3756,6 +3868,22 @@
                         <a:t>Mock pass-rate lift; calibration-Δ closure</a:t>
                       </a:r>
                     </a:p>
+                  </a:txBody>
+                  <a:tcPr/>
+                </a:tc>
+                <a:tc>
+                  <a:txBody>
+                    <a:bodyPr/>
+                    <a:lstStyle/>
+                    <a:p/>
+                  </a:txBody>
+                  <a:tcPr/>
+                </a:tc>
+                <a:tc>
+                  <a:txBody>
+                    <a:bodyPr/>
+                    <a:lstStyle/>
+                    <a:p/>
                   </a:txBody>
                   <a:tcPr/>
                 </a:tc>
@@ -3768,7 +3896,20 @@
                     <a:p>
                       <a:r>
                         <a:rPr sz="1100"/>
-                        <a:t>LM3 Generation-before-reveal</a:t>
+                        <a:t>Recognition-ease beats generation in default UX</a:t>
+                      </a:r>
+                    </a:p>
+                  </a:txBody>
+                  <a:tcPr/>
+                </a:tc>
+                <a:tc>
+                  <a:txBody>
+                    <a:bodyPr/>
+                    <a:lstStyle/>
+                    <a:p>
+                      <a:r>
+                        <a:rPr sz="1100"/>
+                        <a:t>LM3 Generation-before-reveal field in QuizRunner.tsx; principle-write required before answer</a:t>
                       </a:r>
                     </a:p>
                   </a:txBody>
@@ -3794,9 +3935,25 @@
                     <a:p>
                       <a:r>
                         <a:rPr sz="1100"/>
-                        <a:t>Long-term retention +30%</a:t>
-                      </a:r>
-                    </a:p>
+                        <a:t>Long-term retention +30% precedent</a:t>
+                      </a:r>
+                    </a:p>
+                  </a:txBody>
+                  <a:tcPr/>
+                </a:tc>
+                <a:tc>
+                  <a:txBody>
+                    <a:bodyPr/>
+                    <a:lstStyle/>
+                    <a:p/>
+                  </a:txBody>
+                  <a:tcPr/>
+                </a:tc>
+                <a:tc>
+                  <a:txBody>
+                    <a:bodyPr/>
+                    <a:lstStyle/>
+                    <a:p/>
                   </a:txBody>
                   <a:tcPr/>
                 </a:tc>
@@ -3809,20 +3966,33 @@
                     <a:p>
                       <a:r>
                         <a:rPr sz="1100"/>
-                        <a:t>LM4 Interleaved recommender</a:t>
-                      </a:r>
-                    </a:p>
-                  </a:txBody>
-                  <a:tcPr/>
-                </a:tc>
-                <a:tc>
-                  <a:txBody>
-                    <a:bodyPr/>
-                    <a:lstStyle/>
-                    <a:p>
-                      <a:r>
-                        <a:rPr sz="1100"/>
-                        <a:t>Rohrer &amp; Taylor 2007</a:t>
+                        <a:t>Blocked practice transfers ~30% worse</a:t>
+                      </a:r>
+                    </a:p>
+                  </a:txBody>
+                  <a:tcPr/>
+                </a:tc>
+                <a:tc>
+                  <a:txBody>
+                    <a:bodyPr/>
+                    <a:lstStyle/>
+                    <a:p>
+                      <a:r>
+                        <a:rPr sz="1100"/>
+                        <a:t>LM4 Interleaving constraint in recommendation.ts: nextPick.subArea !== lastPick.subArea</a:t>
+                      </a:r>
+                    </a:p>
+                  </a:txBody>
+                  <a:tcPr/>
+                </a:tc>
+                <a:tc>
+                  <a:txBody>
+                    <a:bodyPr/>
+                    <a:lstStyle/>
+                    <a:p>
+                      <a:r>
+                        <a:rPr sz="1100"/>
+                        <a:t>Rohrer &amp; Taylor 2007 (63% shuffled vs 20% blocked)</a:t>
                       </a:r>
                     </a:p>
                   </a:txBody>
@@ -3838,6 +4008,22 @@
                         <a:t>Transfer-question accuracy lift</a:t>
                       </a:r>
                     </a:p>
+                  </a:txBody>
+                  <a:tcPr/>
+                </a:tc>
+                <a:tc>
+                  <a:txBody>
+                    <a:bodyPr/>
+                    <a:lstStyle/>
+                    <a:p/>
+                  </a:txBody>
+                  <a:tcPr/>
+                </a:tc>
+                <a:tc>
+                  <a:txBody>
+                    <a:bodyPr/>
+                    <a:lstStyle/>
+                    <a:p/>
                   </a:txBody>
                   <a:tcPr/>
                 </a:tc>
@@ -3850,7 +4036,20 @@
                     <a:p>
                       <a:r>
                         <a:rPr sz="1100"/>
-                        <a:t>LM5 Worked-example fading + expertise-reversal cutover</a:t>
+                        <a:t>Static scaffolding hurts intermediates (expertise-reversal)</a:t>
+                      </a:r>
+                    </a:p>
+                  </a:txBody>
+                  <a:tcPr/>
+                </a:tc>
+                <a:tc>
+                  <a:txBody>
+                    <a:bodyPr/>
+                    <a:lstStyle/>
+                    <a:p>
+                      <a:r>
+                        <a:rPr sz="1100"/>
+                        <a:t>LM5 Worked-example fading + rung-3 cutover; lesson-depth toggle gains "solo" rung</a:t>
                       </a:r>
                     </a:p>
                   </a:txBody>
@@ -3879,6 +4078,22 @@
                         <a:t>Per-rung intervention efficacy</a:t>
                       </a:r>
                     </a:p>
+                  </a:txBody>
+                  <a:tcPr/>
+                </a:tc>
+                <a:tc>
+                  <a:txBody>
+                    <a:bodyPr/>
+                    <a:lstStyle/>
+                    <a:p/>
+                  </a:txBody>
+                  <a:tcPr/>
+                </a:tc>
+                <a:tc>
+                  <a:txBody>
+                    <a:bodyPr/>
+                    <a:lstStyle/>
+                    <a:p/>
                   </a:txBody>
                   <a:tcPr/>
                 </a:tc>
@@ -3891,7 +4106,20 @@
                     <a:p>
                       <a:r>
                         <a:rPr sz="1100"/>
-                        <a:t>LM6 Calibration column</a:t>
+                        <a:t>Dunning-Kruger gap invisible</a:t>
+                      </a:r>
+                    </a:p>
+                  </a:txBody>
+                  <a:tcPr/>
+                </a:tc>
+                <a:tc>
+                  <a:txBody>
+                    <a:bodyPr/>
+                    <a:lstStyle/>
+                    <a:p>
+                      <a:r>
+                        <a:rPr sz="1100"/>
+                        <a:t>LM6 JOL slider before reveal; calibration-Δ in StatsPanel.tsx; weekly trend persisted</a:t>
                       </a:r>
                     </a:p>
                   </a:txBody>
@@ -3917,7 +4145,33 @@
                     <a:p>
                       <a:r>
                         <a:rPr sz="1100"/>
-                        <a:t>Calibration-Δ trend toward 0.5</a:t>
+                        <a:t>\</a:t>
+                      </a:r>
+                    </a:p>
+                  </a:txBody>
+                  <a:tcPr/>
+                </a:tc>
+                <a:tc>
+                  <a:txBody>
+                    <a:bodyPr/>
+                    <a:lstStyle/>
+                    <a:p>
+                      <a:r>
+                        <a:rPr sz="1100"/>
+                        <a:t>Δ\</a:t>
+                      </a:r>
+                    </a:p>
+                  </a:txBody>
+                  <a:tcPr/>
+                </a:tc>
+                <a:tc>
+                  <a:txBody>
+                    <a:bodyPr/>
+                    <a:lstStyle/>
+                    <a:p>
+                      <a:r>
+                        <a:rPr sz="1100"/>
+                        <a:t>trend toward 0.5 over 8-week window</a:t>
                       </a:r>
                     </a:p>
                   </a:txBody>
@@ -3932,20 +4186,33 @@
                     <a:p>
                       <a:r>
                         <a:rPr sz="1100"/>
-                        <a:t>LM7 Streak push (variable-ratio)</a:t>
-                      </a:r>
-                    </a:p>
-                  </a:txBody>
-                  <a:tcPr/>
-                </a:tc>
-                <a:tc>
-                  <a:txBody>
-                    <a:bodyPr/>
-                    <a:lstStyle/>
-                    <a:p>
-                      <a:r>
-                        <a:rPr sz="1100"/>
-                        <a:t>Eyal 2014; Skinner; Mazal 2022 (Duolingo)</a:t>
+                        <a:t>Streak computed but no return-trigger</a:t>
+                      </a:r>
+                    </a:p>
+                  </a:txBody>
+                  <a:tcPr/>
+                </a:tc>
+                <a:tc>
+                  <a:txBody>
+                    <a:bodyPr/>
+                    <a:lstStyle/>
+                    <a:p>
+                      <a:r>
+                        <a:rPr sz="1100"/>
+                        <a:t>LM7 Web-push at modal study-time + email digest; bandit-optimised cadence; streak-freeze</a:t>
+                      </a:r>
+                    </a:p>
+                  </a:txBody>
+                  <a:tcPr/>
+                </a:tc>
+                <a:tc>
+                  <a:txBody>
+                    <a:bodyPr/>
+                    <a:lstStyle/>
+                    <a:p>
+                      <a:r>
+                        <a:rPr sz="1100"/>
+                        <a:t>Eyal 2014; Skinner (variable-ratio); Mazal 2022 (Duolingo)</a:t>
                       </a:r>
                     </a:p>
                   </a:txBody>
@@ -3961,6 +4228,22 @@
                         <a:t>CURR +21%, DAU 4.5× precedent</a:t>
                       </a:r>
                     </a:p>
+                  </a:txBody>
+                  <a:tcPr/>
+                </a:tc>
+                <a:tc>
+                  <a:txBody>
+                    <a:bodyPr/>
+                    <a:lstStyle/>
+                    <a:p/>
+                  </a:txBody>
+                  <a:tcPr/>
+                </a:tc>
+                <a:tc>
+                  <a:txBody>
+                    <a:bodyPr/>
+                    <a:lstStyle/>
+                    <a:p/>
                   </a:txBody>
                   <a:tcPr/>
                 </a:tc>
@@ -3973,20 +4256,33 @@
                     <a:p>
                       <a:r>
                         <a:rPr sz="1100"/>
-                        <a:t>LM8 Cohort surface</a:t>
-                      </a:r>
-                    </a:p>
-                  </a:txBody>
-                  <a:tcPr/>
-                </a:tc>
-                <a:tc>
-                  <a:txBody>
-                    <a:bodyPr/>
-                    <a:lstStyle/>
-                    <a:p>
-                      <a:r>
-                        <a:rPr sz="1100"/>
-                        <a:t>Maven W1→W2 96% vs MOOC 16%; Reich &amp; Ruipérez-Valiente 2019 (Science)</a:t>
+                        <a:t>MOOC 3–10% completion — no relatedness surface</a:t>
+                      </a:r>
+                    </a:p>
+                  </a:txBody>
+                  <a:tcPr/>
+                </a:tc>
+                <a:tc>
+                  <a:txBody>
+                    <a:bodyPr/>
+                    <a:lstStyle/>
+                    <a:p>
+                      <a:r>
+                        <a:rPr sz="1100"/>
+                        <a:t>LM8 Per-cohort routes; peer-comparison panel; group leaderboard primitive; live-cohort touchpoint</a:t>
+                      </a:r>
+                    </a:p>
+                  </a:txBody>
+                  <a:tcPr/>
+                </a:tc>
+                <a:tc>
+                  <a:txBody>
+                    <a:bodyPr/>
+                    <a:lstStyle/>
+                    <a:p>
+                      <a:r>
+                        <a:rPr sz="1100"/>
+                        <a:t>Ryan &amp; Deci (SDT — relatedness); Maven W1→W2 96% vs MOOC 16%; Reich 2019 Science</a:t>
                       </a:r>
                     </a:p>
                   </a:txBody>
@@ -4002,6 +4298,814 @@
                         <a:t>Course-completion rate ≥ 60% target</a:t>
                       </a:r>
                     </a:p>
+                  </a:txBody>
+                  <a:tcPr/>
+                </a:tc>
+                <a:tc>
+                  <a:txBody>
+                    <a:bodyPr/>
+                    <a:lstStyle/>
+                    <a:p/>
+                  </a:txBody>
+                  <a:tcPr/>
+                </a:tc>
+                <a:tc>
+                  <a:txBody>
+                    <a:bodyPr/>
+                    <a:lstStyle/>
+                    <a:p/>
+                  </a:txBody>
+                  <a:tcPr/>
+                </a:tc>
+              </a:tr>
+            </a:tbl>
+          </a:graphicData>
+        </a:graphic>
+      </p:graphicFrame>
+      <p:graphicFrame>
+        <p:nvGraphicFramePr>
+          <p:cNvPr id="5" name="Table 4"/>
+          <p:cNvGraphicFramePr>
+            <a:graphicFrameLocks noGrp="1"/>
+          </p:cNvGraphicFramePr>
+          <p:nvPr/>
+        </p:nvGraphicFramePr>
+        <p:xfrm>
+          <a:off x="457200" y="3474720"/>
+          <a:ext cx="11247120" cy="3703320"/>
+        </p:xfrm>
+        <a:graphic>
+          <a:graphicData uri="http://schemas.openxmlformats.org/drawingml/2006/table">
+            <a:tbl>
+              <a:tblPr firstRow="1" bandRow="1">
+                <a:tableStyleId>{5C22544A-7EE6-4342-B048-85BDC9FD1C3A}</a:tableStyleId>
+              </a:tblPr>
+              <a:tblGrid>
+                <a:gridCol w="1606731"/>
+                <a:gridCol w="1606731"/>
+                <a:gridCol w="1606731"/>
+                <a:gridCol w="1606731"/>
+                <a:gridCol w="1606731"/>
+                <a:gridCol w="1606731"/>
+                <a:gridCol w="1606734"/>
+              </a:tblGrid>
+              <a:tr h="411480">
+                <a:tc>
+                  <a:txBody>
+                    <a:bodyPr/>
+                    <a:lstStyle/>
+                    <a:p>
+                      <a:r>
+                        <a:rPr sz="1100" b="1">
+                          <a:solidFill>
+                            <a:srgbClr val="FFFFFF"/>
+                          </a:solidFill>
+                        </a:rPr>
+                        <a:t>Problem solved</a:t>
+                      </a:r>
+                    </a:p>
+                  </a:txBody>
+                  <a:tcPr>
+                    <a:solidFill>
+                      <a:srgbClr val="1A1A2E"/>
+                    </a:solidFill>
+                  </a:tcPr>
+                </a:tc>
+                <a:tc>
+                  <a:txBody>
+                    <a:bodyPr/>
+                    <a:lstStyle/>
+                    <a:p>
+                      <a:r>
+                        <a:rPr sz="1100" b="1">
+                          <a:solidFill>
+                            <a:srgbClr val="FFFFFF"/>
+                          </a:solidFill>
+                        </a:rPr>
+                        <a:t>Feature (specific surface)</a:t>
+                      </a:r>
+                    </a:p>
+                  </a:txBody>
+                  <a:tcPr>
+                    <a:solidFill>
+                      <a:srgbClr val="1A1A2E"/>
+                    </a:solidFill>
+                  </a:tcPr>
+                </a:tc>
+                <a:tc>
+                  <a:txBody>
+                    <a:bodyPr/>
+                    <a:lstStyle/>
+                    <a:p>
+                      <a:r>
+                        <a:rPr sz="1100" b="1">
+                          <a:solidFill>
+                            <a:srgbClr val="FFFFFF"/>
+                          </a:solidFill>
+                        </a:rPr>
+                        <a:t>Source</a:t>
+                      </a:r>
+                    </a:p>
+                  </a:txBody>
+                  <a:tcPr>
+                    <a:solidFill>
+                      <a:srgbClr val="1A1A2E"/>
+                    </a:solidFill>
+                  </a:tcPr>
+                </a:tc>
+                <a:tc>
+                  <a:txBody>
+                    <a:bodyPr/>
+                    <a:lstStyle/>
+                    <a:p>
+                      <a:r>
+                        <a:rPr sz="1100" b="1">
+                          <a:solidFill>
+                            <a:srgbClr val="FFFFFF"/>
+                          </a:solidFill>
+                        </a:rPr>
+                        <a:t>Measured outcome</a:t>
+                      </a:r>
+                    </a:p>
+                  </a:txBody>
+                  <a:tcPr>
+                    <a:solidFill>
+                      <a:srgbClr val="1A1A2E"/>
+                    </a:solidFill>
+                  </a:tcPr>
+                </a:tc>
+                <a:tc>
+                  <a:txBody>
+                    <a:bodyPr/>
+                    <a:lstStyle/>
+                    <a:p/>
+                  </a:txBody>
+                  <a:tcPr>
+                    <a:solidFill>
+                      <a:srgbClr val="1A1A2E"/>
+                    </a:solidFill>
+                  </a:tcPr>
+                </a:tc>
+                <a:tc>
+                  <a:txBody>
+                    <a:bodyPr/>
+                    <a:lstStyle/>
+                    <a:p/>
+                  </a:txBody>
+                  <a:tcPr>
+                    <a:solidFill>
+                      <a:srgbClr val="1A1A2E"/>
+                    </a:solidFill>
+                  </a:tcPr>
+                </a:tc>
+                <a:tc>
+                  <a:txBody>
+                    <a:bodyPr/>
+                    <a:lstStyle/>
+                    <a:p/>
+                  </a:txBody>
+                  <a:tcPr>
+                    <a:solidFill>
+                      <a:srgbClr val="1A1A2E"/>
+                    </a:solidFill>
+                  </a:tcPr>
+                </a:tc>
+              </a:tr>
+              <a:tr h="411480">
+                <a:tc>
+                  <a:txBody>
+                    <a:bodyPr/>
+                    <a:lstStyle/>
+                    <a:p>
+                      <a:r>
+                        <a:rPr sz="1100"/>
+                        <a:t>SMEs omit ~70% of decisions self-narrating</a:t>
+                      </a:r>
+                    </a:p>
+                  </a:txBody>
+                  <a:tcPr/>
+                </a:tc>
+                <a:tc>
+                  <a:txBody>
+                    <a:bodyPr/>
+                    <a:lstStyle/>
+                    <a:p>
+                      <a:r>
+                        <a:rPr sz="1100"/>
+                        <a:t>SM1 DrafterIntake schema — 5 required JSON fields; admin app blocks publish if any empty</a:t>
+                      </a:r>
+                    </a:p>
+                  </a:txBody>
+                  <a:tcPr/>
+                </a:tc>
+                <a:tc>
+                  <a:txBody>
+                    <a:bodyPr/>
+                    <a:lstStyle/>
+                    <a:p>
+                      <a:r>
+                        <a:rPr sz="1100"/>
+                        <a:t>Clark / Feldon; Lee 2004 (+46% gain, d ≈ 1.72); Tofel-Grehl &amp; Feldon 2013</a:t>
+                      </a:r>
+                    </a:p>
+                  </a:txBody>
+                  <a:tcPr/>
+                </a:tc>
+                <a:tc>
+                  <a:txBody>
+                    <a:bodyPr/>
+                    <a:lstStyle/>
+                    <a:p>
+                      <a:r>
+                        <a:rPr sz="1100"/>
+                        <a:t>SME-content learner-pass-rate vs unscaffolded baseline</a:t>
+                      </a:r>
+                    </a:p>
+                  </a:txBody>
+                  <a:tcPr/>
+                </a:tc>
+                <a:tc>
+                  <a:txBody>
+                    <a:bodyPr/>
+                    <a:lstStyle/>
+                    <a:p/>
+                  </a:txBody>
+                  <a:tcPr/>
+                </a:tc>
+                <a:tc>
+                  <a:txBody>
+                    <a:bodyPr/>
+                    <a:lstStyle/>
+                    <a:p/>
+                  </a:txBody>
+                  <a:tcPr/>
+                </a:tc>
+                <a:tc>
+                  <a:txBody>
+                    <a:bodyPr/>
+                    <a:lstStyle/>
+                    <a:p/>
+                  </a:txBody>
+                  <a:tcPr/>
+                </a:tc>
+              </a:tr>
+              <a:tr h="411480">
+                <a:tc>
+                  <a:txBody>
+                    <a:bodyPr/>
+                    <a:lstStyle/>
+                    <a:p>
+                      <a:r>
+                        <a:rPr sz="1100"/>
+                        <a:t>"Telling what I know" instead of designing toward an assessment</a:t>
+                      </a:r>
+                    </a:p>
+                  </a:txBody>
+                  <a:tcPr/>
+                </a:tc>
+                <a:tc>
+                  <a:txBody>
+                    <a:bodyPr/>
+                    <a:lstStyle/>
+                    <a:p>
+                      <a:r>
+                        <a:rPr sz="1100"/>
+                        <a:t>SM2 Backward-design "write the test first" mode; lesson editor locked until assessment authored</a:t>
+                      </a:r>
+                    </a:p>
+                  </a:txBody>
+                  <a:tcPr/>
+                </a:tc>
+                <a:tc>
+                  <a:txBody>
+                    <a:bodyPr/>
+                    <a:lstStyle/>
+                    <a:p>
+                      <a:r>
+                        <a:rPr sz="1100"/>
+                        <a:t>Wiggins &amp; McTighe 1998</a:t>
+                      </a:r>
+                    </a:p>
+                  </a:txBody>
+                  <a:tcPr/>
+                </a:tc>
+                <a:tc>
+                  <a:txBody>
+                    <a:bodyPr/>
+                    <a:lstStyle/>
+                    <a:p>
+                      <a:r>
+                        <a:rPr sz="1100"/>
+                        <a:t>Lesson measurability gate (every lesson has a passing assessment)</a:t>
+                      </a:r>
+                    </a:p>
+                  </a:txBody>
+                  <a:tcPr/>
+                </a:tc>
+                <a:tc>
+                  <a:txBody>
+                    <a:bodyPr/>
+                    <a:lstStyle/>
+                    <a:p/>
+                  </a:txBody>
+                  <a:tcPr/>
+                </a:tc>
+                <a:tc>
+                  <a:txBody>
+                    <a:bodyPr/>
+                    <a:lstStyle/>
+                    <a:p/>
+                  </a:txBody>
+                  <a:tcPr/>
+                </a:tc>
+                <a:tc>
+                  <a:txBody>
+                    <a:bodyPr/>
+                    <a:lstStyle/>
+                    <a:p/>
+                  </a:txBody>
+                  <a:tcPr/>
+                </a:tc>
+              </a:tr>
+              <a:tr h="411480">
+                <a:tc>
+                  <a:txBody>
+                    <a:bodyPr/>
+                    <a:lstStyle/>
+                    <a:p>
+                      <a:r>
+                        <a:rPr sz="1100"/>
+                        <a:t>Principle-only or example-only ships</a:t>
+                      </a:r>
+                    </a:p>
+                  </a:txBody>
+                  <a:tcPr/>
+                </a:tc>
+                <a:tc>
+                  <a:txBody>
+                    <a:bodyPr/>
+                    <a:lstStyle/>
+                    <a:p>
+                      <a:r>
+                        <a:rPr sz="1100"/>
+                        <a:t>SM3 Worked-example pair editor (worked + faded mandatory); critic refuse-to-publish if either missing</a:t>
+                      </a:r>
+                    </a:p>
+                  </a:txBody>
+                  <a:tcPr/>
+                </a:tc>
+                <a:tc>
+                  <a:txBody>
+                    <a:bodyPr/>
+                    <a:lstStyle/>
+                    <a:p>
+                      <a:r>
+                        <a:rPr sz="1100"/>
+                        <a:t>Sweller; Renkl (faded worked examples)</a:t>
+                      </a:r>
+                    </a:p>
+                  </a:txBody>
+                  <a:tcPr/>
+                </a:tc>
+                <a:tc>
+                  <a:txBody>
+                    <a:bodyPr/>
+                    <a:lstStyle/>
+                    <a:p>
+                      <a:r>
+                        <a:rPr sz="1100"/>
+                        <a:t>4C/ID supportive-info coverage</a:t>
+                      </a:r>
+                    </a:p>
+                  </a:txBody>
+                  <a:tcPr/>
+                </a:tc>
+                <a:tc>
+                  <a:txBody>
+                    <a:bodyPr/>
+                    <a:lstStyle/>
+                    <a:p/>
+                  </a:txBody>
+                  <a:tcPr/>
+                </a:tc>
+                <a:tc>
+                  <a:txBody>
+                    <a:bodyPr/>
+                    <a:lstStyle/>
+                    <a:p/>
+                  </a:txBody>
+                  <a:tcPr/>
+                </a:tc>
+                <a:tc>
+                  <a:txBody>
+                    <a:bodyPr/>
+                    <a:lstStyle/>
+                    <a:p/>
+                  </a:txBody>
+                  <a:tcPr/>
+                </a:tc>
+              </a:tr>
+              <a:tr h="411480">
+                <a:tc>
+                  <a:txBody>
+                    <a:bodyPr/>
+                    <a:lstStyle/>
+                    <a:p>
+                      <a:r>
+                        <a:rPr sz="1100"/>
+                        <a:t>Curse of expertise — bridging steps under-explained</a:t>
+                      </a:r>
+                    </a:p>
+                  </a:txBody>
+                  <a:tcPr/>
+                </a:tc>
+                <a:tc>
+                  <a:txBody>
+                    <a:bodyPr/>
+                    <a:lstStyle/>
+                    <a:p>
+                      <a:r>
+                        <a:rPr sz="1100"/>
+                        <a:t>SM4 "What would a novice get wrong here?" textarea required; critic surfaces blind_spot_flags</a:t>
+                      </a:r>
+                    </a:p>
+                  </a:txBody>
+                  <a:tcPr/>
+                </a:tc>
+                <a:tc>
+                  <a:txBody>
+                    <a:bodyPr/>
+                    <a:lstStyle/>
+                    <a:p>
+                      <a:r>
+                        <a:rPr sz="1100"/>
+                        <a:t>Nathan &amp; Petrosino 2003; Hinds 1999</a:t>
+                      </a:r>
+                    </a:p>
+                  </a:txBody>
+                  <a:tcPr/>
+                </a:tc>
+                <a:tc>
+                  <a:txBody>
+                    <a:bodyPr/>
+                    <a:lstStyle/>
+                    <a:p>
+                      <a:r>
+                        <a:rPr sz="1100"/>
+                        <a:t>Critic-rejection-rate trend per SME</a:t>
+                      </a:r>
+                    </a:p>
+                  </a:txBody>
+                  <a:tcPr/>
+                </a:tc>
+                <a:tc>
+                  <a:txBody>
+                    <a:bodyPr/>
+                    <a:lstStyle/>
+                    <a:p/>
+                  </a:txBody>
+                  <a:tcPr/>
+                </a:tc>
+                <a:tc>
+                  <a:txBody>
+                    <a:bodyPr/>
+                    <a:lstStyle/>
+                    <a:p/>
+                  </a:txBody>
+                  <a:tcPr/>
+                </a:tc>
+                <a:tc>
+                  <a:txBody>
+                    <a:bodyPr/>
+                    <a:lstStyle/>
+                    <a:p/>
+                  </a:txBody>
+                  <a:tcPr/>
+                </a:tc>
+              </a:tr>
+              <a:tr h="411480">
+                <a:tc>
+                  <a:txBody>
+                    <a:bodyPr/>
+                    <a:lstStyle/>
+                    <a:p>
+                      <a:r>
+                        <a:rPr sz="1100"/>
+                        <a:t>Free-typed principle drift</a:t>
+                      </a:r>
+                    </a:p>
+                  </a:txBody>
+                  <a:tcPr/>
+                </a:tc>
+                <a:tc>
+                  <a:txBody>
+                    <a:bodyPr/>
+                    <a:lstStyle/>
+                    <a:p>
+                      <a:r>
+                        <a:rPr sz="1100"/>
+                        <a:t>SM5 Closed-taxonomy principle-picker; rejection if free-typed and unmapped</a:t>
+                      </a:r>
+                    </a:p>
+                  </a:txBody>
+                  <a:tcPr/>
+                </a:tc>
+                <a:tc>
+                  <a:txBody>
+                    <a:bodyPr/>
+                    <a:lstStyle/>
+                    <a:p>
+                      <a:r>
+                        <a:rPr sz="1100"/>
+                        <a:t>Knowles; Bloom revised</a:t>
+                      </a:r>
+                    </a:p>
+                  </a:txBody>
+                  <a:tcPr/>
+                </a:tc>
+                <a:tc>
+                  <a:txBody>
+                    <a:bodyPr/>
+                    <a:lstStyle/>
+                    <a:p>
+                      <a:r>
+                        <a:rPr sz="1100"/>
+                        <a:t>Cross-concept retrieval consistency</a:t>
+                      </a:r>
+                    </a:p>
+                  </a:txBody>
+                  <a:tcPr/>
+                </a:tc>
+                <a:tc>
+                  <a:txBody>
+                    <a:bodyPr/>
+                    <a:lstStyle/>
+                    <a:p/>
+                  </a:txBody>
+                  <a:tcPr/>
+                </a:tc>
+                <a:tc>
+                  <a:txBody>
+                    <a:bodyPr/>
+                    <a:lstStyle/>
+                    <a:p/>
+                  </a:txBody>
+                  <a:tcPr/>
+                </a:tc>
+                <a:tc>
+                  <a:txBody>
+                    <a:bodyPr/>
+                    <a:lstStyle/>
+                    <a:p/>
+                  </a:txBody>
+                  <a:tcPr/>
+                </a:tc>
+              </a:tr>
+              <a:tr h="411480">
+                <a:tc>
+                  <a:txBody>
+                    <a:bodyPr/>
+                    <a:lstStyle/>
+                    <a:p>
+                      <a:r>
+                        <a:rPr sz="1100"/>
+                        <a:t>4C/ID component coverage gaps</a:t>
+                      </a:r>
+                    </a:p>
+                  </a:txBody>
+                  <a:tcPr/>
+                </a:tc>
+                <a:tc>
+                  <a:txBody>
+                    <a:bodyPr/>
+                    <a:lstStyle/>
+                    <a:p>
+                      <a:r>
+                        <a:rPr sz="1100"/>
+                        <a:t>SM6 Critic returns `missing_components: ('learning_tasks' \</a:t>
+                      </a:r>
+                    </a:p>
+                  </a:txBody>
+                  <a:tcPr/>
+                </a:tc>
+                <a:tc>
+                  <a:txBody>
+                    <a:bodyPr/>
+                    <a:lstStyle/>
+                    <a:p>
+                      <a:r>
+                        <a:rPr sz="1100"/>
+                        <a:t>'supportive_info' \</a:t>
+                      </a:r>
+                    </a:p>
+                  </a:txBody>
+                  <a:tcPr/>
+                </a:tc>
+                <a:tc>
+                  <a:txBody>
+                    <a:bodyPr/>
+                    <a:lstStyle/>
+                    <a:p>
+                      <a:r>
+                        <a:rPr sz="1100"/>
+                        <a:t>'jit_info' \</a:t>
+                      </a:r>
+                    </a:p>
+                  </a:txBody>
+                  <a:tcPr/>
+                </a:tc>
+                <a:tc>
+                  <a:txBody>
+                    <a:bodyPr/>
+                    <a:lstStyle/>
+                    <a:p>
+                      <a:r>
+                        <a:rPr sz="1100"/>
+                        <a:t>'part_task_practice')[]`; refuse-to-publish on any missing</a:t>
+                      </a:r>
+                    </a:p>
+                  </a:txBody>
+                  <a:tcPr/>
+                </a:tc>
+                <a:tc>
+                  <a:txBody>
+                    <a:bodyPr/>
+                    <a:lstStyle/>
+                    <a:p>
+                      <a:r>
+                        <a:rPr sz="1100"/>
+                        <a:t>van Merriënboer 1997 (4C/ID)</a:t>
+                      </a:r>
+                    </a:p>
+                  </a:txBody>
+                  <a:tcPr/>
+                </a:tc>
+                <a:tc>
+                  <a:txBody>
+                    <a:bodyPr/>
+                    <a:lstStyle/>
+                    <a:p>
+                      <a:r>
+                        <a:rPr sz="1100"/>
+                        <a:t>All four components present per published lesson</a:t>
+                      </a:r>
+                    </a:p>
+                  </a:txBody>
+                  <a:tcPr/>
+                </a:tc>
+              </a:tr>
+              <a:tr h="411480">
+                <a:tc>
+                  <a:txBody>
+                    <a:bodyPr/>
+                    <a:lstStyle/>
+                    <a:p>
+                      <a:r>
+                        <a:rPr sz="1100"/>
+                        <a:t>Tacit knowledge unrecoverable from text-from-blank</a:t>
+                      </a:r>
+                    </a:p>
+                  </a:txBody>
+                  <a:tcPr/>
+                </a:tc>
+                <a:tc>
+                  <a:txBody>
+                    <a:bodyPr/>
+                    <a:lstStyle/>
+                    <a:p>
+                      <a:r>
+                        <a:rPr sz="1100"/>
+                        <a:t>SM7 Voice-first / camera-first authoring + auto-draft into 5-probe intake (mobile-first for deskless)</a:t>
+                      </a:r>
+                    </a:p>
+                  </a:txBody>
+                  <a:tcPr/>
+                </a:tc>
+                <a:tc>
+                  <a:txBody>
+                    <a:bodyPr/>
+                    <a:lstStyle/>
+                    <a:p>
+                      <a:r>
+                        <a:rPr sz="1100"/>
+                        <a:t>Polanyi 1966; CTA-for-skilled-trades; TalentCards (~2.7B deskless)</a:t>
+                      </a:r>
+                    </a:p>
+                  </a:txBody>
+                  <a:tcPr/>
+                </a:tc>
+                <a:tc>
+                  <a:txBody>
+                    <a:bodyPr/>
+                    <a:lstStyle/>
+                    <a:p>
+                      <a:r>
+                        <a:rPr sz="1100"/>
+                        <a:t>SME TTFV ≤ 1 hour for tacit-knowledge segments</a:t>
+                      </a:r>
+                    </a:p>
+                  </a:txBody>
+                  <a:tcPr/>
+                </a:tc>
+                <a:tc>
+                  <a:txBody>
+                    <a:bodyPr/>
+                    <a:lstStyle/>
+                    <a:p/>
+                  </a:txBody>
+                  <a:tcPr/>
+                </a:tc>
+                <a:tc>
+                  <a:txBody>
+                    <a:bodyPr/>
+                    <a:lstStyle/>
+                    <a:p/>
+                  </a:txBody>
+                  <a:tcPr/>
+                </a:tc>
+                <a:tc>
+                  <a:txBody>
+                    <a:bodyPr/>
+                    <a:lstStyle/>
+                    <a:p/>
+                  </a:txBody>
+                  <a:tcPr/>
+                </a:tc>
+              </a:tr>
+              <a:tr h="411480">
+                <a:tc>
+                  <a:txBody>
+                    <a:bodyPr/>
+                    <a:lstStyle/>
+                    <a:p>
+                      <a:r>
+                        <a:rPr sz="1100"/>
+                        <a:t>Critic feedback is destination, not loop</a:t>
+                      </a:r>
+                    </a:p>
+                  </a:txBody>
+                  <a:tcPr/>
+                </a:tc>
+                <a:tc>
+                  <a:txBody>
+                    <a:bodyPr/>
+                    <a:lstStyle/>
+                    <a:p>
+                      <a:r>
+                        <a:rPr sz="1100"/>
+                        <a:t>SM8 Per-SME blind-spot dashboard at /admin/sme/[id]/; aggregated critic-feedback over time; personalised authoring prompts</a:t>
+                      </a:r>
+                    </a:p>
+                  </a:txBody>
+                  <a:tcPr/>
+                </a:tc>
+                <a:tc>
+                  <a:txBody>
+                    <a:bodyPr/>
+                    <a:lstStyle/>
+                    <a:p>
+                      <a:r>
+                        <a:rPr sz="1100"/>
+                        <a:t>Ericsson 1993 (deliberate-practice feedback channel)</a:t>
+                      </a:r>
+                    </a:p>
+                  </a:txBody>
+                  <a:tcPr/>
+                </a:tc>
+                <a:tc>
+                  <a:txBody>
+                    <a:bodyPr/>
+                    <a:lstStyle/>
+                    <a:p>
+                      <a:r>
+                        <a:rPr sz="1100"/>
+                        <a:t>Critic-rejection-rate trends down month-over-month per SME</a:t>
+                      </a:r>
+                    </a:p>
+                  </a:txBody>
+                  <a:tcPr/>
+                </a:tc>
+                <a:tc>
+                  <a:txBody>
+                    <a:bodyPr/>
+                    <a:lstStyle/>
+                    <a:p/>
+                  </a:txBody>
+                  <a:tcPr/>
+                </a:tc>
+                <a:tc>
+                  <a:txBody>
+                    <a:bodyPr/>
+                    <a:lstStyle/>
+                    <a:p/>
+                  </a:txBody>
+                  <a:tcPr/>
+                </a:tc>
+                <a:tc>
+                  <a:txBody>
+                    <a:bodyPr/>
+                    <a:lstStyle/>
+                    <a:p/>
                   </a:txBody>
                   <a:tcPr/>
                 </a:tc>

--- a/plans/deck-collaborator.pptx
+++ b/plans/deck-collaborator.pptx
@@ -3607,7 +3607,7 @@
             </a:pPr>
             <a:r>
               <a:rPr sz="1800"/>
-              <a:t>Coverage assertion. Every problem maps to ≥ 1 specific feature (file path or component named); every feature maps to ≥ 1 cited source. No problem is closed by exhortation alone. Cross-ref §D0 in the build plan for the canonical matrix.</a:t>
+              <a:t>Coverage assertion. Every problem maps to ≥ 1 specific feature (file path or component named); every feature maps to ≥ 1 cited source. No problem is closed by exhortation alone. Cross-ref §D0 in the build plan for the canonical matrix; full evidentiary basis in research-and-strategy-dossier.md (industry case studies, problem-by-problem mitigation walkthrough with falsification triggers, full bibliography).</a:t>
             </a:r>
           </a:p>
         </p:txBody>

--- a/plans/deck-collaborator.pptx
+++ b/plans/deck-collaborator.pptx
@@ -3607,7 +3607,7 @@
             </a:pPr>
             <a:r>
               <a:rPr sz="1800"/>
-              <a:t>Coverage assertion. Every problem maps to ≥ 1 specific feature (file path or component named); every feature maps to ≥ 1 cited source. No problem is closed by exhortation alone. Cross-ref §D0 in the build plan for the canonical matrix; full evidentiary basis in research-and-strategy-dossier.md (industry case studies, problem-by-problem mitigation walkthrough with falsification triggers, full bibliography).</a:t>
+              <a:t>Coverage assertion. Every problem maps to ≥ 1 specific feature (file path or component named); every feature maps to ≥ 1 cited source. No problem is closed by exhortation alone. Cross-ref §D0 in the build plan for the canonical matrix; full evidentiary basis in research-and-strategy-dossier.md (industry case studies, problem-by-problem mitigation walkthrough with falsification triggers, full bibliography). Independent critical-review framework: expert-review-audit.md — 68+ pre-populated audit rows for psychology / learning / business-partner reviewer roles; per-row score + recommendation; operator commits to acting on every "abandon-claim" within 30 days.</a:t>
             </a:r>
           </a:p>
         </p:txBody>
